--- a/system-design-101/vi/lessons/sd-06-013/slides/sd-06-013.pptx
+++ b/system-design-101/vi/lessons/sd-06-013/slides/sd-06-013.pptx
@@ -1785,107 +1785,128 @@
         </p:nvSpPr>
         <p:spPr>
           <a:xfrm>
-            <a:off x="952500" y="5429250"/>
-            <a:ext cx="3810000" cy="762000"/>
-          </a:xfrm>
-          <a:prstGeom prst="roundRect">
-            <a:avLst>
-              <a:gd name="adj" fmla="val 25000"/>
-            </a:avLst>
-          </a:prstGeom>
-          <a:solidFill>
-            <a:srgbClr val="1E212B"/>
-          </a:solidFill>
-          <a:ln w="28575">
-            <a:solidFill>
-              <a:srgbClr val="FF6A4D"/>
-            </a:solidFill>
-            <a:prstDash val="solid"/>
-          </a:ln>
+            <a:off x="914400" y="5238750"/>
+            <a:ext cx="16459200" cy="571500"/>
+          </a:xfrm>
+          <a:prstGeom prst="rect">
+            <a:avLst/>
+          </a:prstGeom>
+          <a:noFill/>
+          <a:ln/>
         </p:spPr>
         <p:txBody>
           <a:bodyPr wrap="square" lIns="0" tIns="0" rIns="0" bIns="0" rtlCol="0" anchor="ctr"/>
           <a:lstStyle/>
           <a:p>
-            <a:pPr algn="ctr" indent="0" marL="0">
+            <a:pPr algn="l" indent="0" marL="0">
               <a:buNone/>
             </a:pPr>
             <a:r>
-              <a:rPr lang="en-US" sz="2400" b="1" dirty="0" spc="-52" kern="0">
-                <a:solidFill>
-                  <a:srgbClr val="F3EEE3"/>
-                </a:solidFill>
-                <a:latin typeface="Be Vietnam Pro" pitchFamily="34" charset="0"/>
-                <a:ea typeface="Be Vietnam Pro" pitchFamily="34" charset="-122"/>
-                <a:cs typeface="Be Vietnam Pro" pitchFamily="34" charset="-120"/>
-              </a:rPr>
-              <a:t>Kẻ</a:t>
-            </a:r>
-            <a:r>
-              <a:rPr lang="en-US" sz="2400" b="1" dirty="0" spc="-2" kern="0">
-                <a:solidFill>
-                  <a:srgbClr val="F3EEE3"/>
-                </a:solidFill>
-                <a:latin typeface="Be Vietnam Pro" pitchFamily="34" charset="0"/>
-                <a:ea typeface="Be Vietnam Pro" pitchFamily="34" charset="-122"/>
-                <a:cs typeface="Be Vietnam Pro" pitchFamily="34" charset="-120"/>
-              </a:rPr>
-              <a:t> tấn</a:t>
-            </a:r>
-            <a:r>
-              <a:rPr lang="en-US" sz="2400" b="1" dirty="0" spc="-9" kern="0">
-                <a:solidFill>
-                  <a:srgbClr val="F3EEE3"/>
-                </a:solidFill>
-                <a:latin typeface="Be Vietnam Pro" pitchFamily="34" charset="0"/>
-                <a:ea typeface="Be Vietnam Pro" pitchFamily="34" charset="-122"/>
-                <a:cs typeface="Be Vietnam Pro" pitchFamily="34" charset="-120"/>
-              </a:rPr>
-              <a:t> công</a:t>
-            </a:r>
-            <a:endParaRPr lang="en-US" sz="2400" dirty="0"/>
+              <a:rPr lang="en-US" sz="3000" dirty="0" spc="-22" kern="0">
+                <a:solidFill>
+                  <a:srgbClr val="E4E1D8"/>
+                </a:solidFill>
+                <a:latin typeface="Be Vietnam Pro" pitchFamily="34" charset="0"/>
+                <a:ea typeface="Be Vietnam Pro" pitchFamily="34" charset="-122"/>
+                <a:cs typeface="Be Vietnam Pro" pitchFamily="34" charset="-120"/>
+              </a:rPr>
+              <a:t>Cất</a:t>
+            </a:r>
+            <a:r>
+              <a:rPr lang="en-US" sz="3000" dirty="0" spc="2" kern="0">
+                <a:solidFill>
+                  <a:srgbClr val="E4E1D8"/>
+                </a:solidFill>
+                <a:latin typeface="Be Vietnam Pro" pitchFamily="34" charset="0"/>
+                <a:ea typeface="Be Vietnam Pro" pitchFamily="34" charset="-122"/>
+                <a:cs typeface="Be Vietnam Pro" pitchFamily="34" charset="-120"/>
+              </a:rPr>
+              <a:t> giá</a:t>
+            </a:r>
+            <a:r>
+              <a:rPr lang="en-US" sz="3000" dirty="0" spc="15" kern="0">
+                <a:solidFill>
+                  <a:srgbClr val="E4E1D8"/>
+                </a:solidFill>
+                <a:latin typeface="Be Vietnam Pro" pitchFamily="34" charset="0"/>
+                <a:ea typeface="Be Vietnam Pro" pitchFamily="34" charset="-122"/>
+                <a:cs typeface="Be Vietnam Pro" pitchFamily="34" charset="-120"/>
+              </a:rPr>
+              <a:t> trị</a:t>
+            </a:r>
+            <a:r>
+              <a:rPr lang="en-US" sz="3000" dirty="0" spc="-22" kern="0">
+                <a:solidFill>
+                  <a:srgbClr val="E4E1D8"/>
+                </a:solidFill>
+                <a:latin typeface="Be Vietnam Pro" pitchFamily="34" charset="0"/>
+                <a:ea typeface="Be Vietnam Pro" pitchFamily="34" charset="-122"/>
+                <a:cs typeface="Be Vietnam Pro" pitchFamily="34" charset="-120"/>
+              </a:rPr>
+              <a:t> rỗng rồi,</a:t>
+            </a:r>
+            <a:r>
+              <a:rPr lang="en-US" sz="3000" dirty="0" spc="-7" kern="0">
+                <a:solidFill>
+                  <a:srgbClr val="E4E1D8"/>
+                </a:solidFill>
+                <a:latin typeface="Be Vietnam Pro" pitchFamily="34" charset="0"/>
+                <a:ea typeface="Be Vietnam Pro" pitchFamily="34" charset="-122"/>
+                <a:cs typeface="Be Vietnam Pro" pitchFamily="34" charset="-120"/>
+              </a:rPr>
+              <a:t> sao</a:t>
+            </a:r>
+            <a:r>
+              <a:rPr lang="en-US" sz="3000" dirty="0" spc="-16" kern="0">
+                <a:solidFill>
+                  <a:srgbClr val="E4E1D8"/>
+                </a:solidFill>
+                <a:latin typeface="Be Vietnam Pro" pitchFamily="34" charset="0"/>
+                <a:ea typeface="Be Vietnam Pro" pitchFamily="34" charset="-122"/>
+                <a:cs typeface="Be Vietnam Pro" pitchFamily="34" charset="-120"/>
+              </a:rPr>
+              <a:t> vẫn</a:t>
+            </a:r>
+            <a:r>
+              <a:rPr lang="en-US" sz="3000" dirty="0" spc="1" kern="0">
+                <a:solidFill>
+                  <a:srgbClr val="E4E1D8"/>
+                </a:solidFill>
+                <a:latin typeface="Be Vietnam Pro" pitchFamily="34" charset="0"/>
+                <a:ea typeface="Be Vietnam Pro" pitchFamily="34" charset="-122"/>
+                <a:cs typeface="Be Vietnam Pro" pitchFamily="34" charset="-120"/>
+              </a:rPr>
+              <a:t> quá</a:t>
+            </a:r>
+            <a:r>
+              <a:rPr lang="en-US" sz="3000" dirty="0" spc="-13" kern="0">
+                <a:solidFill>
+                  <a:srgbClr val="E4E1D8"/>
+                </a:solidFill>
+                <a:latin typeface="Be Vietnam Pro" pitchFamily="34" charset="0"/>
+                <a:ea typeface="Be Vietnam Pro" pitchFamily="34" charset="-122"/>
+                <a:cs typeface="Be Vietnam Pro" pitchFamily="34" charset="-120"/>
+              </a:rPr>
+              <a:t> tải?</a:t>
+            </a:r>
+            <a:endParaRPr lang="en-US" sz="3000" dirty="0"/>
           </a:p>
         </p:txBody>
       </p:sp>
       <p:sp>
         <p:nvSpPr>
-          <p:cNvPr id="5" name="Connector line-1792372219678-279095075"/>
-          <p:cNvSpPr/>
-          <p:nvPr/>
-        </p:nvSpPr>
-        <p:spPr>
-          <a:xfrm>
-            <a:off x="2857500" y="6286500"/>
-            <a:ext cx="0" cy="2857500"/>
-          </a:xfrm>
-          <a:prstGeom prst="line">
-            <a:avLst/>
-          </a:prstGeom>
-          <a:noFill/>
-          <a:ln w="28575">
-            <a:solidFill>
-              <a:srgbClr val="2E3240"/>
-            </a:solidFill>
-            <a:prstDash val="lgDash"/>
-            <a:headEnd type="none"/>
-            <a:tailEnd type="none"/>
-          </a:ln>
-        </p:spPr>
-      </p:sp>
-      <p:sp>
-        <p:nvSpPr>
-          <p:cNvPr id="6" name="Text 4"/>
-          <p:cNvSpPr/>
-          <p:nvPr/>
-        </p:nvSpPr>
-        <p:spPr>
-          <a:xfrm>
-            <a:off x="7239000" y="5429250"/>
-            <a:ext cx="3810000" cy="762000"/>
+          <p:cNvPr id="5" name="Shape 3"/>
+          <p:cNvSpPr/>
+          <p:nvPr/>
+        </p:nvSpPr>
+        <p:spPr>
+          <a:xfrm>
+            <a:off x="914400" y="6286500"/>
+            <a:ext cx="8077200" cy="2095500"/>
           </a:xfrm>
           <a:prstGeom prst="roundRect">
             <a:avLst>
-              <a:gd name="adj" fmla="val 25000"/>
+              <a:gd name="adj" fmla="val 10909"/>
             </a:avLst>
           </a:prstGeom>
           <a:solidFill>
@@ -1898,216 +1919,17 @@
             <a:prstDash val="solid"/>
           </a:ln>
         </p:spPr>
-        <p:txBody>
-          <a:bodyPr wrap="square" lIns="0" tIns="0" rIns="0" bIns="0" rtlCol="0" anchor="ctr"/>
-          <a:lstStyle/>
-          <a:p>
-            <a:pPr algn="ctr" indent="0" marL="0">
-              <a:buNone/>
-            </a:pPr>
-            <a:r>
-              <a:rPr lang="en-US" sz="2400" b="1" dirty="0" spc="3" kern="0">
-                <a:solidFill>
-                  <a:srgbClr val="F3EEE3"/>
-                </a:solidFill>
-                <a:latin typeface="Be Vietnam Pro" pitchFamily="34" charset="0"/>
-                <a:ea typeface="Be Vietnam Pro" pitchFamily="34" charset="-122"/>
-                <a:cs typeface="Be Vietnam Pro" pitchFamily="34" charset="-120"/>
-              </a:rPr>
-              <a:t>Bộ</a:t>
-            </a:r>
-            <a:r>
-              <a:rPr lang="en-US" sz="2400" b="1" dirty="0" spc="-4" kern="0">
-                <a:solidFill>
-                  <a:srgbClr val="F3EEE3"/>
-                </a:solidFill>
-                <a:latin typeface="Be Vietnam Pro" pitchFamily="34" charset="0"/>
-                <a:ea typeface="Be Vietnam Pro" pitchFamily="34" charset="-122"/>
-                <a:cs typeface="Be Vietnam Pro" pitchFamily="34" charset="-120"/>
-              </a:rPr>
-              <a:t> nhớ</a:t>
-            </a:r>
-            <a:r>
-              <a:rPr lang="en-US" sz="2400" b="1" dirty="0" spc="2" kern="0">
-                <a:solidFill>
-                  <a:srgbClr val="F3EEE3"/>
-                </a:solidFill>
-                <a:latin typeface="Be Vietnam Pro" pitchFamily="34" charset="0"/>
-                <a:ea typeface="Be Vietnam Pro" pitchFamily="34" charset="-122"/>
-                <a:cs typeface="Be Vietnam Pro" pitchFamily="34" charset="-120"/>
-              </a:rPr>
-              <a:t> đệm</a:t>
-            </a:r>
-            <a:endParaRPr lang="en-US" sz="2400" dirty="0"/>
-          </a:p>
-        </p:txBody>
-      </p:sp>
-      <p:sp>
-        <p:nvSpPr>
-          <p:cNvPr id="7" name="Connector line-1792372219681-569291100"/>
-          <p:cNvSpPr/>
-          <p:nvPr/>
-        </p:nvSpPr>
-        <p:spPr>
-          <a:xfrm>
-            <a:off x="9144000" y="6286500"/>
-            <a:ext cx="0" cy="2857500"/>
-          </a:xfrm>
-          <a:prstGeom prst="line">
-            <a:avLst/>
-          </a:prstGeom>
-          <a:noFill/>
-          <a:ln w="28575">
-            <a:solidFill>
-              <a:srgbClr val="2E3240"/>
-            </a:solidFill>
-            <a:prstDash val="lgDash"/>
-            <a:headEnd type="none"/>
-            <a:tailEnd type="none"/>
-          </a:ln>
-        </p:spPr>
-      </p:sp>
-      <p:sp>
-        <p:nvSpPr>
-          <p:cNvPr id="8" name="Text 6"/>
-          <p:cNvSpPr/>
-          <p:nvPr/>
-        </p:nvSpPr>
-        <p:spPr>
-          <a:xfrm>
-            <a:off x="13525500" y="5429250"/>
-            <a:ext cx="3810000" cy="762000"/>
-          </a:xfrm>
-          <a:prstGeom prst="roundRect">
-            <a:avLst>
-              <a:gd name="adj" fmla="val 25000"/>
-            </a:avLst>
-          </a:prstGeom>
-          <a:solidFill>
-            <a:srgbClr val="1E212B"/>
-          </a:solidFill>
-          <a:ln w="28575">
-            <a:solidFill>
-              <a:srgbClr val="9AA0B5"/>
-            </a:solidFill>
-            <a:prstDash val="solid"/>
-          </a:ln>
-        </p:spPr>
-        <p:txBody>
-          <a:bodyPr wrap="square" lIns="0" tIns="0" rIns="0" bIns="0" rtlCol="0" anchor="ctr"/>
-          <a:lstStyle/>
-          <a:p>
-            <a:pPr algn="ctr" indent="0" marL="0">
-              <a:buNone/>
-            </a:pPr>
-            <a:r>
-              <a:rPr lang="en-US" sz="2400" b="1" dirty="0" spc="1" kern="0">
-                <a:solidFill>
-                  <a:srgbClr val="F3EEE3"/>
-                </a:solidFill>
-                <a:latin typeface="Be Vietnam Pro" pitchFamily="34" charset="0"/>
-                <a:ea typeface="Be Vietnam Pro" pitchFamily="34" charset="-122"/>
-                <a:cs typeface="Be Vietnam Pro" pitchFamily="34" charset="-120"/>
-              </a:rPr>
-              <a:t>Cơ</a:t>
-            </a:r>
-            <a:r>
-              <a:rPr lang="en-US" sz="2400" b="1" dirty="0" spc="-1" kern="0">
-                <a:solidFill>
-                  <a:srgbClr val="F3EEE3"/>
-                </a:solidFill>
-                <a:latin typeface="Be Vietnam Pro" pitchFamily="34" charset="0"/>
-                <a:ea typeface="Be Vietnam Pro" pitchFamily="34" charset="-122"/>
-                <a:cs typeface="Be Vietnam Pro" pitchFamily="34" charset="-120"/>
-              </a:rPr>
-              <a:t> sở</a:t>
-            </a:r>
-            <a:r>
-              <a:rPr lang="en-US" sz="2400" b="1" dirty="0" spc="4" kern="0">
-                <a:solidFill>
-                  <a:srgbClr val="F3EEE3"/>
-                </a:solidFill>
-                <a:latin typeface="Be Vietnam Pro" pitchFamily="34" charset="0"/>
-                <a:ea typeface="Be Vietnam Pro" pitchFamily="34" charset="-122"/>
-                <a:cs typeface="Be Vietnam Pro" pitchFamily="34" charset="-120"/>
-              </a:rPr>
-              <a:t> dữ</a:t>
-            </a:r>
-            <a:r>
-              <a:rPr lang="en-US" sz="2400" b="1" dirty="0" spc="0" kern="0">
-                <a:solidFill>
-                  <a:srgbClr val="F3EEE3"/>
-                </a:solidFill>
-                <a:latin typeface="Be Vietnam Pro" pitchFamily="34" charset="0"/>
-                <a:ea typeface="Be Vietnam Pro" pitchFamily="34" charset="-122"/>
-                <a:cs typeface="Be Vietnam Pro" pitchFamily="34" charset="-120"/>
-              </a:rPr>
-              <a:t> liệu</a:t>
-            </a:r>
-            <a:endParaRPr lang="en-US" sz="2400" dirty="0"/>
-          </a:p>
-        </p:txBody>
-      </p:sp>
-      <p:sp>
-        <p:nvSpPr>
-          <p:cNvPr id="9" name="Connector line-1792372219685-962491497"/>
-          <p:cNvSpPr/>
-          <p:nvPr/>
-        </p:nvSpPr>
-        <p:spPr>
-          <a:xfrm>
-            <a:off x="15430500" y="6286500"/>
-            <a:ext cx="0" cy="2857500"/>
-          </a:xfrm>
-          <a:prstGeom prst="line">
-            <a:avLst/>
-          </a:prstGeom>
-          <a:noFill/>
-          <a:ln w="28575">
-            <a:solidFill>
-              <a:srgbClr val="2E3240"/>
-            </a:solidFill>
-            <a:prstDash val="lgDash"/>
-            <a:headEnd type="none"/>
-            <a:tailEnd type="none"/>
-          </a:ln>
-        </p:spPr>
-      </p:sp>
-      <p:sp>
-        <p:nvSpPr>
-          <p:cNvPr id="10" name="Connector line-1792372219685-307086855"/>
-          <p:cNvSpPr/>
-          <p:nvPr/>
-        </p:nvSpPr>
-        <p:spPr>
-          <a:xfrm>
-            <a:off x="2857500" y="6858000"/>
-            <a:ext cx="6286500" cy="0"/>
-          </a:xfrm>
-          <a:prstGeom prst="line">
-            <a:avLst/>
-          </a:prstGeom>
-          <a:noFill/>
-          <a:ln w="38100">
-            <a:solidFill>
-              <a:srgbClr val="F3EEE3"/>
-            </a:solidFill>
-            <a:prstDash val="solid"/>
-            <a:headEnd type="none"/>
-            <a:tailEnd type="triangle" w="lg" len="lg"/>
-          </a:ln>
-        </p:spPr>
-      </p:sp>
-      <p:sp>
-        <p:nvSpPr>
-          <p:cNvPr id="11" name="Text 9"/>
-          <p:cNvSpPr/>
-          <p:nvPr/>
-        </p:nvSpPr>
-        <p:spPr>
-          <a:xfrm>
-            <a:off x="3048000" y="6419850"/>
-            <a:ext cx="5905500" cy="381000"/>
+      </p:sp>
+      <p:sp>
+        <p:nvSpPr>
+          <p:cNvPr id="6" name="Text 4"/>
+          <p:cNvSpPr/>
+          <p:nvPr/>
+        </p:nvSpPr>
+        <p:spPr>
+          <a:xfrm>
+            <a:off x="1295400" y="6477000"/>
+            <a:ext cx="952500" cy="1714500"/>
           </a:xfrm>
           <a:prstGeom prst="rect">
             <a:avLst/>
@@ -2123,121 +1945,30 @@
               <a:buNone/>
             </a:pPr>
             <a:r>
-              <a:rPr lang="en-US" sz="2100" b="1" dirty="0" spc="5" kern="0">
-                <a:solidFill>
-                  <a:srgbClr val="F3EEE3"/>
-                </a:solidFill>
-                <a:latin typeface="Be Vietnam Pro" pitchFamily="34" charset="0"/>
-                <a:ea typeface="Be Vietnam Pro" pitchFamily="34" charset="-122"/>
-                <a:cs typeface="Be Vietnam Pro" pitchFamily="34" charset="-120"/>
+              <a:rPr lang="en-US" sz="7200" dirty="0" spc="-6" kern="0">
+                <a:solidFill>
+                  <a:srgbClr val="FFB454"/>
+                </a:solidFill>
+                <a:latin typeface="Bricolage Grotesque ExtraBold" pitchFamily="34" charset="0"/>
+                <a:ea typeface="Bricolage Grotesque ExtraBold" pitchFamily="34" charset="-122"/>
+                <a:cs typeface="Bricolage Grotesque ExtraBold" pitchFamily="34" charset="-120"/>
               </a:rPr>
               <a:t>1</a:t>
             </a:r>
-            <a:r>
-              <a:rPr lang="en-US" sz="2100" b="1" dirty="0" spc="-1" kern="0">
-                <a:solidFill>
-                  <a:srgbClr val="F3EEE3"/>
-                </a:solidFill>
-                <a:latin typeface="Be Vietnam Pro" pitchFamily="34" charset="0"/>
-                <a:ea typeface="Be Vietnam Pro" pitchFamily="34" charset="-122"/>
-                <a:cs typeface="Be Vietnam Pro" pitchFamily="34" charset="-120"/>
-              </a:rPr>
-              <a:t> ·</a:t>
-            </a:r>
-            <a:r>
-              <a:rPr lang="en-US" sz="2100" b="1" dirty="0" spc="0" kern="0">
-                <a:solidFill>
-                  <a:srgbClr val="F3EEE3"/>
-                </a:solidFill>
-                <a:latin typeface="Be Vietnam Pro" pitchFamily="34" charset="0"/>
-                <a:ea typeface="Be Vietnam Pro" pitchFamily="34" charset="-122"/>
-                <a:cs typeface="Be Vietnam Pro" pitchFamily="34" charset="-120"/>
-              </a:rPr>
-              <a:t> Xin</a:t>
-            </a:r>
-            <a:r>
-              <a:rPr lang="en-US" sz="2100" b="1" dirty="0" spc="-6" kern="0">
-                <a:solidFill>
-                  <a:srgbClr val="F3EEE3"/>
-                </a:solidFill>
-                <a:latin typeface="Be Vietnam Pro" pitchFamily="34" charset="0"/>
-                <a:ea typeface="Be Vietnam Pro" pitchFamily="34" charset="-122"/>
-                <a:cs typeface="Be Vietnam Pro" pitchFamily="34" charset="-120"/>
-              </a:rPr>
-              <a:t> mã</a:t>
-            </a:r>
-            <a:r>
-              <a:rPr lang="en-US" sz="2100" b="1" dirty="0" spc="-8" kern="0">
-                <a:solidFill>
-                  <a:srgbClr val="F3EEE3"/>
-                </a:solidFill>
-                <a:latin typeface="Be Vietnam Pro" pitchFamily="34" charset="0"/>
-                <a:ea typeface="Be Vietnam Pro" pitchFamily="34" charset="-122"/>
-                <a:cs typeface="Be Vietnam Pro" pitchFamily="34" charset="-120"/>
-              </a:rPr>
-              <a:t> không</a:t>
-            </a:r>
-            <a:r>
-              <a:rPr lang="en-US" sz="2100" b="1" dirty="0" spc="-10" kern="0">
-                <a:solidFill>
-                  <a:srgbClr val="F3EEE3"/>
-                </a:solidFill>
-                <a:latin typeface="Be Vietnam Pro" pitchFamily="34" charset="0"/>
-                <a:ea typeface="Be Vietnam Pro" pitchFamily="34" charset="-122"/>
-                <a:cs typeface="Be Vietnam Pro" pitchFamily="34" charset="-120"/>
-              </a:rPr>
-              <a:t> tồn</a:t>
-            </a:r>
-            <a:r>
-              <a:rPr lang="en-US" sz="2100" b="1" dirty="0" spc="-4" kern="0">
-                <a:solidFill>
-                  <a:srgbClr val="F3EEE3"/>
-                </a:solidFill>
-                <a:latin typeface="Be Vietnam Pro" pitchFamily="34" charset="0"/>
-                <a:ea typeface="Be Vietnam Pro" pitchFamily="34" charset="-122"/>
-                <a:cs typeface="Be Vietnam Pro" pitchFamily="34" charset="-120"/>
-              </a:rPr>
-              <a:t> tại</a:t>
-            </a:r>
-            <a:endParaRPr lang="en-US" sz="2100" dirty="0"/>
+            <a:endParaRPr lang="en-US" sz="7200" dirty="0"/>
           </a:p>
         </p:txBody>
       </p:sp>
       <p:sp>
         <p:nvSpPr>
-          <p:cNvPr id="12" name="Connector line-1792372219688-238763073"/>
-          <p:cNvSpPr/>
-          <p:nvPr/>
-        </p:nvSpPr>
-        <p:spPr>
-          <a:xfrm>
-            <a:off x="9144000" y="7524750"/>
-            <a:ext cx="6286500" cy="0"/>
-          </a:xfrm>
-          <a:prstGeom prst="line">
-            <a:avLst/>
-          </a:prstGeom>
-          <a:noFill/>
-          <a:ln w="38100">
-            <a:solidFill>
-              <a:srgbClr val="FFB454"/>
-            </a:solidFill>
-            <a:prstDash val="solid"/>
-            <a:headEnd type="none"/>
-            <a:tailEnd type="triangle" w="lg" len="lg"/>
-          </a:ln>
-        </p:spPr>
-      </p:sp>
-      <p:sp>
-        <p:nvSpPr>
-          <p:cNvPr id="13" name="Text 11"/>
-          <p:cNvSpPr/>
-          <p:nvPr/>
-        </p:nvSpPr>
-        <p:spPr>
-          <a:xfrm>
-            <a:off x="9334500" y="7086600"/>
-            <a:ext cx="5905500" cy="381000"/>
+          <p:cNvPr id="7" name="Text 5"/>
+          <p:cNvSpPr/>
+          <p:nvPr/>
+        </p:nvSpPr>
+        <p:spPr>
+          <a:xfrm>
+            <a:off x="2343150" y="6667500"/>
+            <a:ext cx="6286500" cy="666750"/>
           </a:xfrm>
           <a:prstGeom prst="rect">
             <a:avLst/>
@@ -2253,110 +1984,63 @@
               <a:buNone/>
             </a:pPr>
             <a:r>
-              <a:rPr lang="en-US" sz="2100" b="1" dirty="0" spc="-6" kern="0">
-                <a:solidFill>
-                  <a:srgbClr val="FFB454"/>
-                </a:solidFill>
-                <a:latin typeface="Be Vietnam Pro" pitchFamily="34" charset="0"/>
-                <a:ea typeface="Be Vietnam Pro" pitchFamily="34" charset="-122"/>
-                <a:cs typeface="Be Vietnam Pro" pitchFamily="34" charset="-120"/>
-              </a:rPr>
-              <a:t>2</a:t>
-            </a:r>
-            <a:r>
-              <a:rPr lang="en-US" sz="2100" b="1" dirty="0" spc="-1" kern="0">
-                <a:solidFill>
-                  <a:srgbClr val="FFB454"/>
-                </a:solidFill>
-                <a:latin typeface="Be Vietnam Pro" pitchFamily="34" charset="0"/>
-                <a:ea typeface="Be Vietnam Pro" pitchFamily="34" charset="-122"/>
-                <a:cs typeface="Be Vietnam Pro" pitchFamily="34" charset="-120"/>
-              </a:rPr>
-              <a:t> ·</a:t>
-            </a:r>
-            <a:r>
-              <a:rPr lang="en-US" sz="2100" b="1" dirty="0" spc="-7" kern="0">
-                <a:solidFill>
-                  <a:srgbClr val="FFB454"/>
-                </a:solidFill>
-                <a:latin typeface="Be Vietnam Pro" pitchFamily="34" charset="0"/>
-                <a:ea typeface="Be Vietnam Pro" pitchFamily="34" charset="-122"/>
-                <a:cs typeface="Be Vietnam Pro" pitchFamily="34" charset="-120"/>
-              </a:rPr>
-              <a:t> Không</a:t>
-            </a:r>
-            <a:r>
-              <a:rPr lang="en-US" sz="2100" b="1" dirty="0" spc="-5" kern="0">
-                <a:solidFill>
-                  <a:srgbClr val="FFB454"/>
-                </a:solidFill>
-                <a:latin typeface="Be Vietnam Pro" pitchFamily="34" charset="0"/>
-                <a:ea typeface="Be Vietnam Pro" pitchFamily="34" charset="-122"/>
-                <a:cs typeface="Be Vietnam Pro" pitchFamily="34" charset="-120"/>
-              </a:rPr>
-              <a:t> có:</a:t>
-            </a:r>
-            <a:r>
-              <a:rPr lang="en-US" sz="2100" b="1" dirty="0" spc="-6" kern="0">
-                <a:solidFill>
-                  <a:srgbClr val="FFB454"/>
-                </a:solidFill>
-                <a:latin typeface="Be Vietnam Pro" pitchFamily="34" charset="0"/>
-                <a:ea typeface="Be Vietnam Pro" pitchFamily="34" charset="-122"/>
-                <a:cs typeface="Be Vietnam Pro" pitchFamily="34" charset="-120"/>
-              </a:rPr>
-              <a:t> hỏi</a:t>
-            </a:r>
-            <a:r>
-              <a:rPr lang="en-US" sz="2100" b="1" dirty="0" spc="-5" kern="0">
-                <a:solidFill>
-                  <a:srgbClr val="FFB454"/>
-                </a:solidFill>
-                <a:latin typeface="Be Vietnam Pro" pitchFamily="34" charset="0"/>
-                <a:ea typeface="Be Vietnam Pro" pitchFamily="34" charset="-122"/>
-                <a:cs typeface="Be Vietnam Pro" pitchFamily="34" charset="-120"/>
-              </a:rPr>
-              <a:t> tiếp</a:t>
-            </a:r>
-            <a:endParaRPr lang="en-US" sz="2100" dirty="0"/>
+              <a:rPr lang="en-US" sz="3600" dirty="0" spc="0" kern="0">
+                <a:solidFill>
+                  <a:srgbClr val="F3EEE3"/>
+                </a:solidFill>
+                <a:latin typeface="Bricolage Grotesque ExtraBold" pitchFamily="34" charset="0"/>
+                <a:ea typeface="Bricolage Grotesque ExtraBold" pitchFamily="34" charset="-122"/>
+                <a:cs typeface="Bricolage Grotesque ExtraBold" pitchFamily="34" charset="-120"/>
+              </a:rPr>
+              <a:t>Cất</a:t>
+            </a:r>
+            <a:r>
+              <a:rPr lang="en-US" sz="3600" dirty="0" spc="5" kern="0">
+                <a:solidFill>
+                  <a:srgbClr val="F3EEE3"/>
+                </a:solidFill>
+                <a:latin typeface="Bricolage Grotesque ExtraBold" pitchFamily="34" charset="0"/>
+                <a:ea typeface="Bricolage Grotesque ExtraBold" pitchFamily="34" charset="-122"/>
+                <a:cs typeface="Bricolage Grotesque ExtraBold" pitchFamily="34" charset="-120"/>
+              </a:rPr>
+              <a:t> giá</a:t>
+            </a:r>
+            <a:r>
+              <a:rPr lang="en-US" sz="3600" dirty="0" spc="3" kern="0">
+                <a:solidFill>
+                  <a:srgbClr val="F3EEE3"/>
+                </a:solidFill>
+                <a:latin typeface="Bricolage Grotesque ExtraBold" pitchFamily="34" charset="0"/>
+                <a:ea typeface="Bricolage Grotesque ExtraBold" pitchFamily="34" charset="-122"/>
+                <a:cs typeface="Bricolage Grotesque ExtraBold" pitchFamily="34" charset="-120"/>
+              </a:rPr>
+              <a:t> trị</a:t>
+            </a:r>
+            <a:r>
+              <a:rPr lang="en-US" sz="3600" dirty="0" spc="-7" kern="0">
+                <a:solidFill>
+                  <a:srgbClr val="F3EEE3"/>
+                </a:solidFill>
+                <a:latin typeface="Bricolage Grotesque ExtraBold" pitchFamily="34" charset="0"/>
+                <a:ea typeface="Bricolage Grotesque ExtraBold" pitchFamily="34" charset="-122"/>
+                <a:cs typeface="Bricolage Grotesque ExtraBold" pitchFamily="34" charset="-120"/>
+              </a:rPr>
+              <a:t> rỗng</a:t>
+            </a:r>
+            <a:endParaRPr lang="en-US" sz="3600" dirty="0"/>
           </a:p>
         </p:txBody>
       </p:sp>
       <p:sp>
         <p:nvSpPr>
-          <p:cNvPr id="14" name="Connector line-1792372219690-535320344"/>
-          <p:cNvSpPr/>
-          <p:nvPr/>
-        </p:nvSpPr>
-        <p:spPr>
-          <a:xfrm flipH="1">
-            <a:off x="9144000" y="8191500"/>
-            <a:ext cx="6286500" cy="0"/>
-          </a:xfrm>
-          <a:prstGeom prst="line">
-            <a:avLst/>
-          </a:prstGeom>
-          <a:noFill/>
-          <a:ln w="38100">
-            <a:solidFill>
-              <a:srgbClr val="9AA0B5"/>
-            </a:solidFill>
-            <a:prstDash val="solid"/>
-            <a:headEnd type="none"/>
-            <a:tailEnd type="triangle" w="lg" len="lg"/>
-          </a:ln>
-        </p:spPr>
-      </p:sp>
-      <p:sp>
-        <p:nvSpPr>
-          <p:cNvPr id="15" name="Text 13"/>
-          <p:cNvSpPr/>
-          <p:nvPr/>
-        </p:nvSpPr>
-        <p:spPr>
-          <a:xfrm>
-            <a:off x="9334500" y="7753350"/>
-            <a:ext cx="5905500" cy="381000"/>
+          <p:cNvPr id="8" name="Text 6"/>
+          <p:cNvSpPr/>
+          <p:nvPr/>
+        </p:nvSpPr>
+        <p:spPr>
+          <a:xfrm>
+            <a:off x="2343150" y="7429500"/>
+            <a:ext cx="6286500" cy="571500"/>
           </a:xfrm>
           <a:prstGeom prst="rect">
             <a:avLst/>
@@ -2372,88 +2056,112 @@
               <a:buNone/>
             </a:pPr>
             <a:r>
-              <a:rPr lang="en-US" sz="2100" b="1" dirty="0" spc="3" kern="0">
-                <a:solidFill>
-                  <a:srgbClr val="9AA0B5"/>
-                </a:solidFill>
-                <a:latin typeface="Be Vietnam Pro" pitchFamily="34" charset="0"/>
-                <a:ea typeface="Be Vietnam Pro" pitchFamily="34" charset="-122"/>
-                <a:cs typeface="Be Vietnam Pro" pitchFamily="34" charset="-120"/>
-              </a:rPr>
-              <a:t>3</a:t>
-            </a:r>
-            <a:r>
-              <a:rPr lang="en-US" sz="2100" b="1" dirty="0" spc="-1" kern="0">
-                <a:solidFill>
-                  <a:srgbClr val="9AA0B5"/>
-                </a:solidFill>
-                <a:latin typeface="Be Vietnam Pro" pitchFamily="34" charset="0"/>
-                <a:ea typeface="Be Vietnam Pro" pitchFamily="34" charset="-122"/>
-                <a:cs typeface="Be Vietnam Pro" pitchFamily="34" charset="-120"/>
-              </a:rPr>
-              <a:t> ·</a:t>
-            </a:r>
-            <a:r>
-              <a:rPr lang="en-US" sz="2100" b="1" dirty="0" spc="-7" kern="0">
-                <a:solidFill>
-                  <a:srgbClr val="9AA0B5"/>
-                </a:solidFill>
-                <a:latin typeface="Be Vietnam Pro" pitchFamily="34" charset="0"/>
-                <a:ea typeface="Be Vietnam Pro" pitchFamily="34" charset="-122"/>
-                <a:cs typeface="Be Vietnam Pro" pitchFamily="34" charset="-120"/>
-              </a:rPr>
-              <a:t> Không</a:t>
-            </a:r>
-            <a:r>
-              <a:rPr lang="en-US" sz="2100" b="1" dirty="0" spc="-8" kern="0">
-                <a:solidFill>
-                  <a:srgbClr val="9AA0B5"/>
-                </a:solidFill>
-                <a:latin typeface="Be Vietnam Pro" pitchFamily="34" charset="0"/>
-                <a:ea typeface="Be Vietnam Pro" pitchFamily="34" charset="-122"/>
-                <a:cs typeface="Be Vietnam Pro" pitchFamily="34" charset="-120"/>
-              </a:rPr>
-              <a:t> có</a:t>
-            </a:r>
-            <a:endParaRPr lang="en-US" sz="2100" dirty="0"/>
+              <a:rPr lang="en-US" sz="2400" dirty="0" spc="0" kern="0">
+                <a:solidFill>
+                  <a:srgbClr val="E4E1D8"/>
+                </a:solidFill>
+                <a:latin typeface="Be Vietnam Pro" pitchFamily="34" charset="0"/>
+                <a:ea typeface="Be Vietnam Pro" pitchFamily="34" charset="-122"/>
+                <a:cs typeface="Be Vietnam Pro" pitchFamily="34" charset="-120"/>
+              </a:rPr>
+              <a:t>chặn</a:t>
+            </a:r>
+            <a:r>
+              <a:rPr lang="en-US" sz="2400" dirty="0" spc="7" kern="0">
+                <a:solidFill>
+                  <a:srgbClr val="E4E1D8"/>
+                </a:solidFill>
+                <a:latin typeface="Be Vietnam Pro" pitchFamily="34" charset="0"/>
+                <a:ea typeface="Be Vietnam Pro" pitchFamily="34" charset="-122"/>
+                <a:cs typeface="Be Vietnam Pro" pitchFamily="34" charset="-120"/>
+              </a:rPr>
+              <a:t> được</a:t>
+            </a:r>
+            <a:r>
+              <a:rPr lang="en-US" sz="2400" dirty="0" spc="3" kern="0">
+                <a:solidFill>
+                  <a:srgbClr val="E4E1D8"/>
+                </a:solidFill>
+                <a:latin typeface="Be Vietnam Pro" pitchFamily="34" charset="0"/>
+                <a:ea typeface="Be Vietnam Pro" pitchFamily="34" charset="-122"/>
+                <a:cs typeface="Be Vietnam Pro" pitchFamily="34" charset="-120"/>
+              </a:rPr>
+              <a:t> mã</a:t>
+            </a:r>
+            <a:r>
+              <a:rPr lang="en-US" sz="2400" dirty="0" spc="0" kern="0">
+                <a:solidFill>
+                  <a:srgbClr val="E4E1D8"/>
+                </a:solidFill>
+                <a:latin typeface="Be Vietnam Pro" pitchFamily="34" charset="0"/>
+                <a:ea typeface="Be Vietnam Pro" pitchFamily="34" charset="-122"/>
+                <a:cs typeface="Be Vietnam Pro" pitchFamily="34" charset="-120"/>
+              </a:rPr>
+              <a:t> hỏi</a:t>
+            </a:r>
+            <a:r>
+              <a:rPr lang="en-US" sz="2400" dirty="0" spc="2" kern="0">
+                <a:solidFill>
+                  <a:srgbClr val="E4E1D8"/>
+                </a:solidFill>
+                <a:latin typeface="Be Vietnam Pro" pitchFamily="34" charset="0"/>
+                <a:ea typeface="Be Vietnam Pro" pitchFamily="34" charset="-122"/>
+                <a:cs typeface="Be Vietnam Pro" pitchFamily="34" charset="-120"/>
+              </a:rPr>
+              <a:t> lặp</a:t>
+            </a:r>
+            <a:r>
+              <a:rPr lang="en-US" sz="2400" dirty="0" spc="1" kern="0">
+                <a:solidFill>
+                  <a:srgbClr val="E4E1D8"/>
+                </a:solidFill>
+                <a:latin typeface="Be Vietnam Pro" pitchFamily="34" charset="0"/>
+                <a:ea typeface="Be Vietnam Pro" pitchFamily="34" charset="-122"/>
+                <a:cs typeface="Be Vietnam Pro" pitchFamily="34" charset="-120"/>
+              </a:rPr>
+              <a:t> lại</a:t>
+            </a:r>
+            <a:endParaRPr lang="en-US" sz="2400" dirty="0"/>
           </a:p>
         </p:txBody>
       </p:sp>
       <p:sp>
         <p:nvSpPr>
-          <p:cNvPr id="16" name="Connector line-1792372219693-843085284"/>
-          <p:cNvSpPr/>
-          <p:nvPr/>
-        </p:nvSpPr>
-        <p:spPr>
-          <a:xfrm flipH="1">
-            <a:off x="2857500" y="8858250"/>
-            <a:ext cx="6286500" cy="0"/>
-          </a:xfrm>
-          <a:prstGeom prst="line">
-            <a:avLst/>
-          </a:prstGeom>
-          <a:noFill/>
-          <a:ln w="38100">
+          <p:cNvPr id="9" name="Shape 7"/>
+          <p:cNvSpPr/>
+          <p:nvPr/>
+        </p:nvSpPr>
+        <p:spPr>
+          <a:xfrm>
+            <a:off x="9296400" y="6286500"/>
+            <a:ext cx="8077200" cy="2095500"/>
+          </a:xfrm>
+          <a:prstGeom prst="roundRect">
+            <a:avLst>
+              <a:gd name="adj" fmla="val 10909"/>
+            </a:avLst>
+          </a:prstGeom>
+          <a:solidFill>
+            <a:srgbClr val="1E212B"/>
+          </a:solidFill>
+          <a:ln w="28575">
             <a:solidFill>
-              <a:srgbClr val="FF6A4D"/>
+              <a:srgbClr val="3DD6A0"/>
             </a:solidFill>
             <a:prstDash val="solid"/>
-            <a:headEnd type="none"/>
-            <a:tailEnd type="triangle" w="lg" len="lg"/>
           </a:ln>
         </p:spPr>
       </p:sp>
       <p:sp>
         <p:nvSpPr>
-          <p:cNvPr id="17" name="Text 15"/>
-          <p:cNvSpPr/>
-          <p:nvPr/>
-        </p:nvSpPr>
-        <p:spPr>
-          <a:xfrm>
-            <a:off x="3048000" y="8420100"/>
-            <a:ext cx="5905500" cy="381000"/>
+          <p:cNvPr id="10" name="Text 8"/>
+          <p:cNvSpPr/>
+          <p:nvPr/>
+        </p:nvSpPr>
+        <p:spPr>
+          <a:xfrm>
+            <a:off x="9677400" y="6477000"/>
+            <a:ext cx="952500" cy="1714500"/>
           </a:xfrm>
           <a:prstGeom prst="rect">
             <a:avLst/>
@@ -2469,111 +2177,200 @@
               <a:buNone/>
             </a:pPr>
             <a:r>
-              <a:rPr lang="en-US" sz="2100" b="1" dirty="0" spc="0" kern="0">
-                <a:solidFill>
-                  <a:srgbClr val="FF6A4D"/>
-                </a:solidFill>
-                <a:latin typeface="Be Vietnam Pro" pitchFamily="34" charset="0"/>
-                <a:ea typeface="Be Vietnam Pro" pitchFamily="34" charset="-122"/>
-                <a:cs typeface="Be Vietnam Pro" pitchFamily="34" charset="-120"/>
-              </a:rPr>
-              <a:t>4</a:t>
-            </a:r>
-            <a:r>
-              <a:rPr lang="en-US" sz="2100" b="1" dirty="0" spc="-1" kern="0">
-                <a:solidFill>
-                  <a:srgbClr val="FF6A4D"/>
-                </a:solidFill>
-                <a:latin typeface="Be Vietnam Pro" pitchFamily="34" charset="0"/>
-                <a:ea typeface="Be Vietnam Pro" pitchFamily="34" charset="-122"/>
-                <a:cs typeface="Be Vietnam Pro" pitchFamily="34" charset="-120"/>
-              </a:rPr>
-              <a:t> ·</a:t>
-            </a:r>
-            <a:r>
-              <a:rPr lang="en-US" sz="2100" b="1" dirty="0" spc="-7" kern="0">
-                <a:solidFill>
-                  <a:srgbClr val="FF6A4D"/>
-                </a:solidFill>
-                <a:latin typeface="Be Vietnam Pro" pitchFamily="34" charset="0"/>
-                <a:ea typeface="Be Vietnam Pro" pitchFamily="34" charset="-122"/>
-                <a:cs typeface="Be Vietnam Pro" pitchFamily="34" charset="-120"/>
-              </a:rPr>
-              <a:t> Không</a:t>
-            </a:r>
-            <a:r>
-              <a:rPr lang="en-US" sz="2100" b="1" dirty="0" spc="-9" kern="0">
-                <a:solidFill>
-                  <a:srgbClr val="FF6A4D"/>
-                </a:solidFill>
-                <a:latin typeface="Be Vietnam Pro" pitchFamily="34" charset="0"/>
-                <a:ea typeface="Be Vietnam Pro" pitchFamily="34" charset="-122"/>
-                <a:cs typeface="Be Vietnam Pro" pitchFamily="34" charset="-120"/>
-              </a:rPr>
-              <a:t> cất</a:t>
-            </a:r>
-            <a:r>
-              <a:rPr lang="en-US" sz="2100" b="1" dirty="0" spc="-3" kern="0">
-                <a:solidFill>
-                  <a:srgbClr val="FF6A4D"/>
-                </a:solidFill>
-                <a:latin typeface="Be Vietnam Pro" pitchFamily="34" charset="0"/>
-                <a:ea typeface="Be Vietnam Pro" pitchFamily="34" charset="-122"/>
-                <a:cs typeface="Be Vietnam Pro" pitchFamily="34" charset="-120"/>
-              </a:rPr>
-              <a:t> gì;</a:t>
-            </a:r>
-            <a:r>
-              <a:rPr lang="en-US" sz="2100" b="1" dirty="0" spc="2" kern="0">
-                <a:solidFill>
-                  <a:srgbClr val="FF6A4D"/>
-                </a:solidFill>
-                <a:latin typeface="Be Vietnam Pro" pitchFamily="34" charset="0"/>
-                <a:ea typeface="Be Vietnam Pro" pitchFamily="34" charset="-122"/>
-                <a:cs typeface="Be Vietnam Pro" pitchFamily="34" charset="-120"/>
-              </a:rPr>
-              <a:t> lần</a:t>
-            </a:r>
-            <a:r>
-              <a:rPr lang="en-US" sz="2100" b="1" dirty="0" spc="-2" kern="0">
-                <a:solidFill>
-                  <a:srgbClr val="FF6A4D"/>
-                </a:solidFill>
-                <a:latin typeface="Be Vietnam Pro" pitchFamily="34" charset="0"/>
-                <a:ea typeface="Be Vietnam Pro" pitchFamily="34" charset="-122"/>
-                <a:cs typeface="Be Vietnam Pro" pitchFamily="34" charset="-120"/>
-              </a:rPr>
-              <a:t> sau</a:t>
-            </a:r>
-            <a:r>
-              <a:rPr lang="en-US" sz="2100" b="1" dirty="0" spc="0" kern="0">
-                <a:solidFill>
-                  <a:srgbClr val="FF6A4D"/>
-                </a:solidFill>
-                <a:latin typeface="Be Vietnam Pro" pitchFamily="34" charset="0"/>
-                <a:ea typeface="Be Vietnam Pro" pitchFamily="34" charset="-122"/>
-                <a:cs typeface="Be Vietnam Pro" pitchFamily="34" charset="-120"/>
-              </a:rPr>
-              <a:t> lặp</a:t>
-            </a:r>
-            <a:r>
-              <a:rPr lang="en-US" sz="2100" b="1" dirty="0" spc="-1" kern="0">
-                <a:solidFill>
-                  <a:srgbClr val="FF6A4D"/>
-                </a:solidFill>
-                <a:latin typeface="Be Vietnam Pro" pitchFamily="34" charset="0"/>
-                <a:ea typeface="Be Vietnam Pro" pitchFamily="34" charset="-122"/>
-                <a:cs typeface="Be Vietnam Pro" pitchFamily="34" charset="-120"/>
-              </a:rPr>
-              <a:t> lại</a:t>
-            </a:r>
-            <a:endParaRPr lang="en-US" sz="2100" dirty="0"/>
+              <a:rPr lang="en-US" sz="7200" dirty="0" spc="5" kern="0">
+                <a:solidFill>
+                  <a:srgbClr val="3DD6A0"/>
+                </a:solidFill>
+                <a:latin typeface="Bricolage Grotesque ExtraBold" pitchFamily="34" charset="0"/>
+                <a:ea typeface="Bricolage Grotesque ExtraBold" pitchFamily="34" charset="-122"/>
+                <a:cs typeface="Bricolage Grotesque ExtraBold" pitchFamily="34" charset="-120"/>
+              </a:rPr>
+              <a:t>2</a:t>
+            </a:r>
+            <a:endParaRPr lang="en-US" sz="7200" dirty="0"/>
           </a:p>
         </p:txBody>
       </p:sp>
       <p:sp>
         <p:nvSpPr>
-          <p:cNvPr id="18" name="Text 16"/>
+          <p:cNvPr id="11" name="Text 9"/>
+          <p:cNvSpPr/>
+          <p:nvPr/>
+        </p:nvSpPr>
+        <p:spPr>
+          <a:xfrm>
+            <a:off x="10725150" y="6667500"/>
+            <a:ext cx="6286500" cy="666750"/>
+          </a:xfrm>
+          <a:prstGeom prst="rect">
+            <a:avLst/>
+          </a:prstGeom>
+          <a:noFill/>
+          <a:ln/>
+        </p:spPr>
+        <p:txBody>
+          <a:bodyPr wrap="square" lIns="0" tIns="0" rIns="0" bIns="0" rtlCol="0" anchor="ctr"/>
+          <a:lstStyle/>
+          <a:p>
+            <a:pPr algn="l" indent="0" marL="0">
+              <a:buNone/>
+            </a:pPr>
+            <a:r>
+              <a:rPr lang="en-US" sz="3600" dirty="0" spc="2" kern="0">
+                <a:solidFill>
+                  <a:srgbClr val="F3EEE3"/>
+                </a:solidFill>
+                <a:latin typeface="Bricolage Grotesque ExtraBold" pitchFamily="34" charset="0"/>
+                <a:ea typeface="Bricolage Grotesque ExtraBold" pitchFamily="34" charset="-122"/>
+                <a:cs typeface="Bricolage Grotesque ExtraBold" pitchFamily="34" charset="-120"/>
+              </a:rPr>
+              <a:t>Bộ</a:t>
+            </a:r>
+            <a:r>
+              <a:rPr lang="en-US" sz="3600" dirty="0" spc="5" kern="0">
+                <a:solidFill>
+                  <a:srgbClr val="F3EEE3"/>
+                </a:solidFill>
+                <a:latin typeface="Bricolage Grotesque ExtraBold" pitchFamily="34" charset="0"/>
+                <a:ea typeface="Bricolage Grotesque ExtraBold" pitchFamily="34" charset="-122"/>
+                <a:cs typeface="Bricolage Grotesque ExtraBold" pitchFamily="34" charset="-120"/>
+              </a:rPr>
+              <a:t> lọc</a:t>
+            </a:r>
+            <a:r>
+              <a:rPr lang="en-US" sz="3600" dirty="0" spc="2" kern="0">
+                <a:solidFill>
+                  <a:srgbClr val="F3EEE3"/>
+                </a:solidFill>
+                <a:latin typeface="Bricolage Grotesque ExtraBold" pitchFamily="34" charset="0"/>
+                <a:ea typeface="Bricolage Grotesque ExtraBold" pitchFamily="34" charset="-122"/>
+                <a:cs typeface="Bricolage Grotesque ExtraBold" pitchFamily="34" charset="-120"/>
+              </a:rPr>
+              <a:t> Bloom</a:t>
+            </a:r>
+            <a:endParaRPr lang="en-US" sz="3600" dirty="0"/>
+          </a:p>
+        </p:txBody>
+      </p:sp>
+      <p:sp>
+        <p:nvSpPr>
+          <p:cNvPr id="12" name="Text 10"/>
+          <p:cNvSpPr/>
+          <p:nvPr/>
+        </p:nvSpPr>
+        <p:spPr>
+          <a:xfrm>
+            <a:off x="10725150" y="7429500"/>
+            <a:ext cx="6286500" cy="571500"/>
+          </a:xfrm>
+          <a:prstGeom prst="rect">
+            <a:avLst/>
+          </a:prstGeom>
+          <a:noFill/>
+          <a:ln/>
+        </p:spPr>
+        <p:txBody>
+          <a:bodyPr wrap="square" lIns="0" tIns="0" rIns="0" bIns="0" rtlCol="0" anchor="ctr"/>
+          <a:lstStyle/>
+          <a:p>
+            <a:pPr algn="l" indent="0" marL="0">
+              <a:buNone/>
+            </a:pPr>
+            <a:r>
+              <a:rPr lang="en-US" sz="2400" dirty="0" spc="0" kern="0">
+                <a:solidFill>
+                  <a:srgbClr val="E4E1D8"/>
+                </a:solidFill>
+                <a:latin typeface="Be Vietnam Pro" pitchFamily="34" charset="0"/>
+                <a:ea typeface="Be Vietnam Pro" pitchFamily="34" charset="-122"/>
+                <a:cs typeface="Be Vietnam Pro" pitchFamily="34" charset="-120"/>
+              </a:rPr>
+              <a:t>chặn</a:t>
+            </a:r>
+            <a:r>
+              <a:rPr lang="en-US" sz="2400" dirty="0" spc="4" kern="0">
+                <a:solidFill>
+                  <a:srgbClr val="E4E1D8"/>
+                </a:solidFill>
+                <a:latin typeface="Be Vietnam Pro" pitchFamily="34" charset="0"/>
+                <a:ea typeface="Be Vietnam Pro" pitchFamily="34" charset="-122"/>
+                <a:cs typeface="Be Vietnam Pro" pitchFamily="34" charset="-120"/>
+              </a:rPr>
+              <a:t> mã</a:t>
+            </a:r>
+            <a:r>
+              <a:rPr lang="en-US" sz="2400" dirty="0" spc="1" kern="0">
+                <a:solidFill>
+                  <a:srgbClr val="E4E1D8"/>
+                </a:solidFill>
+                <a:latin typeface="Be Vietnam Pro" pitchFamily="34" charset="0"/>
+                <a:ea typeface="Be Vietnam Pro" pitchFamily="34" charset="-122"/>
+                <a:cs typeface="Be Vietnam Pro" pitchFamily="34" charset="-120"/>
+              </a:rPr>
+              <a:t> không</a:t>
+            </a:r>
+            <a:r>
+              <a:rPr lang="en-US" sz="2400" dirty="0" spc="0" kern="0">
+                <a:solidFill>
+                  <a:srgbClr val="E4E1D8"/>
+                </a:solidFill>
+                <a:latin typeface="Be Vietnam Pro" pitchFamily="34" charset="0"/>
+                <a:ea typeface="Be Vietnam Pro" pitchFamily="34" charset="-122"/>
+                <a:cs typeface="Be Vietnam Pro" pitchFamily="34" charset="-120"/>
+              </a:rPr>
+              <a:t> có,</a:t>
+            </a:r>
+            <a:r>
+              <a:rPr lang="en-US" sz="2400" dirty="0" spc="6" kern="0">
+                <a:solidFill>
+                  <a:srgbClr val="E4E1D8"/>
+                </a:solidFill>
+                <a:latin typeface="Be Vietnam Pro" pitchFamily="34" charset="0"/>
+                <a:ea typeface="Be Vietnam Pro" pitchFamily="34" charset="-122"/>
+                <a:cs typeface="Be Vietnam Pro" pitchFamily="34" charset="-120"/>
+              </a:rPr>
+              <a:t> trước</a:t>
+            </a:r>
+            <a:r>
+              <a:rPr lang="en-US" sz="2400" dirty="0" spc="-1" kern="0">
+                <a:solidFill>
+                  <a:srgbClr val="E4E1D8"/>
+                </a:solidFill>
+                <a:latin typeface="Be Vietnam Pro" pitchFamily="34" charset="0"/>
+                <a:ea typeface="Be Vietnam Pro" pitchFamily="34" charset="-122"/>
+                <a:cs typeface="Be Vietnam Pro" pitchFamily="34" charset="-120"/>
+              </a:rPr>
+              <a:t> bộ</a:t>
+            </a:r>
+            <a:r>
+              <a:rPr lang="en-US" sz="2400" dirty="0" spc="1" kern="0">
+                <a:solidFill>
+                  <a:srgbClr val="E4E1D8"/>
+                </a:solidFill>
+                <a:latin typeface="Be Vietnam Pro" pitchFamily="34" charset="0"/>
+                <a:ea typeface="Be Vietnam Pro" pitchFamily="34" charset="-122"/>
+                <a:cs typeface="Be Vietnam Pro" pitchFamily="34" charset="-120"/>
+              </a:rPr>
+              <a:t> nhớ</a:t>
+            </a:r>
+            <a:r>
+              <a:rPr lang="en-US" sz="2400" dirty="0" spc="14" kern="0">
+                <a:solidFill>
+                  <a:srgbClr val="E4E1D8"/>
+                </a:solidFill>
+                <a:latin typeface="Be Vietnam Pro" pitchFamily="34" charset="0"/>
+                <a:ea typeface="Be Vietnam Pro" pitchFamily="34" charset="-122"/>
+                <a:cs typeface="Be Vietnam Pro" pitchFamily="34" charset="-120"/>
+              </a:rPr>
+              <a:t> đệm</a:t>
+            </a:r>
+            <a:endParaRPr lang="en-US" sz="2400" dirty="0"/>
+          </a:p>
+        </p:txBody>
+      </p:sp>
+      <p:sp>
+        <p:nvSpPr>
+          <p:cNvPr id="13" name="Text 11"/>
           <p:cNvSpPr/>
           <p:nvPr/>
         </p:nvSpPr>
@@ -2711,7 +2508,7 @@
       </p:sp>
       <p:sp>
         <p:nvSpPr>
-          <p:cNvPr id="19" name="Shape 17"/>
+          <p:cNvPr id="14" name="Shape 12"/>
           <p:cNvSpPr/>
           <p:nvPr/>
         </p:nvSpPr>
@@ -2735,7 +2532,7 @@
       </p:sp>
       <p:pic>
         <p:nvPicPr>
-          <p:cNvPr id="20" name="Moda image moda-export-watermark-27cb8bab-e1fc-489a-aefd-d68a76ee5f00" descr="">    </p:cNvPr>
+          <p:cNvPr id="15" name="Moda image moda-export-watermark-27cb8bab-e1fc-489a-aefd-d68a76ee5f00" descr="">    </p:cNvPr>
           <p:cNvPicPr>
             <a:picLocks noChangeAspect="1"/>
           </p:cNvPicPr>
@@ -3013,7 +2810,7 @@
               <a:buNone/>
             </a:pPr>
             <a:r>
-              <a:rPr lang="en-US" sz="6600" dirty="0" spc="47" kern="0">
+              <a:rPr lang="en-US" sz="6600" dirty="0" spc="2" kern="0">
                 <a:solidFill>
                   <a:srgbClr val="14161C"/>
                 </a:solidFill>
@@ -3021,10 +2818,10 @@
                 <a:ea typeface="Bricolage Grotesque ExtraBold" pitchFamily="34" charset="-122"/>
                 <a:cs typeface="Bricolage Grotesque ExtraBold" pitchFamily="34" charset="-120"/>
               </a:rPr>
-              <a:t>Gửi</a:t>
-            </a:r>
-            <a:r>
-              <a:rPr lang="en-US" sz="6600" dirty="0" spc="1" kern="0">
+              <a:t>Nhiều</a:t>
+            </a:r>
+            <a:r>
+              <a:rPr lang="en-US" sz="6600" dirty="0" spc="0" kern="0">
                 <a:solidFill>
                   <a:srgbClr val="14161C"/>
                 </a:solidFill>
@@ -3032,10 +2829,10 @@
                 <a:ea typeface="Bricolage Grotesque ExtraBold" pitchFamily="34" charset="-122"/>
                 <a:cs typeface="Bricolage Grotesque ExtraBold" pitchFamily="34" charset="-120"/>
               </a:rPr>
-              <a:t> thật nhiều</a:t>
-            </a:r>
-            <a:r>
-              <a:rPr lang="en-US" sz="6600" dirty="0" spc="-1" kern="0">
+              <a:t> mã</a:t>
+            </a:r>
+            <a:r>
+              <a:rPr lang="en-US" sz="6600" dirty="0" spc="1" kern="0">
                 <a:solidFill>
                   <a:srgbClr val="14161C"/>
                 </a:solidFill>
@@ -3043,10 +2840,10 @@
                 <a:ea typeface="Bricolage Grotesque ExtraBold" pitchFamily="34" charset="-122"/>
                 <a:cs typeface="Bricolage Grotesque ExtraBold" pitchFamily="34" charset="-120"/>
               </a:rPr>
-              <a:t> mã</a:t>
-            </a:r>
-            <a:r>
-              <a:rPr lang="en-US" sz="6600" dirty="0" spc="1" kern="0">
+              <a:t> giả:</a:t>
+            </a:r>
+            <a:r>
+              <a:rPr lang="en-US" sz="6600" dirty="0" spc="-6" kern="0">
                 <a:solidFill>
                   <a:srgbClr val="14161C"/>
                 </a:solidFill>
@@ -3054,10 +2851,10 @@
                 <a:ea typeface="Bricolage Grotesque ExtraBold" pitchFamily="34" charset="-122"/>
                 <a:cs typeface="Bricolage Grotesque ExtraBold" pitchFamily="34" charset="-120"/>
               </a:rPr>
-              <a:t> giả:</a:t>
-            </a:r>
-            <a:r>
-              <a:rPr lang="en-US" sz="6600" dirty="0" spc="3" kern="0">
+              <a:t> tải</a:t>
+            </a:r>
+            <a:r>
+              <a:rPr lang="en-US" sz="6600" dirty="0" spc="2" kern="0">
                 <a:solidFill>
                   <a:srgbClr val="14161C"/>
                 </a:solidFill>
@@ -3065,10 +2862,10 @@
                 <a:ea typeface="Bricolage Grotesque ExtraBold" pitchFamily="34" charset="-122"/>
                 <a:cs typeface="Bricolage Grotesque ExtraBold" pitchFamily="34" charset="-120"/>
               </a:rPr>
-              <a:t> bộ</a:t>
-            </a:r>
-            <a:r>
-              <a:rPr lang="en-US" sz="6600" dirty="0" spc="0" kern="0">
+              <a:t> dồn</a:t>
+            </a:r>
+            <a:r>
+              <a:rPr lang="en-US" sz="6600" dirty="0" spc="-2" kern="0">
                 <a:solidFill>
                   <a:srgbClr val="14161C"/>
                 </a:solidFill>
@@ -3076,10 +2873,10 @@
                 <a:ea typeface="Bricolage Grotesque ExtraBold" pitchFamily="34" charset="-122"/>
                 <a:cs typeface="Bricolage Grotesque ExtraBold" pitchFamily="34" charset="-120"/>
               </a:rPr>
-              <a:t> nhớ</a:t>
-            </a:r>
-            <a:r>
-              <a:rPr lang="en-US" sz="6600" dirty="0" spc="15" kern="0">
+              <a:t> xuống</a:t>
+            </a:r>
+            <a:r>
+              <a:rPr lang="en-US" sz="6600" dirty="0" spc="-1" kern="0">
                 <a:solidFill>
                   <a:srgbClr val="14161C"/>
                 </a:solidFill>
@@ -3087,10 +2884,10 @@
                 <a:ea typeface="Bricolage Grotesque ExtraBold" pitchFamily="34" charset="-122"/>
                 <a:cs typeface="Bricolage Grotesque ExtraBold" pitchFamily="34" charset="-120"/>
               </a:rPr>
-              <a:t> đệm</a:t>
-            </a:r>
-            <a:r>
-              <a:rPr lang="en-US" sz="6600" dirty="0" spc="-1" kern="0">
+              <a:t> cơ</a:t>
+            </a:r>
+            <a:r>
+              <a:rPr lang="en-US" sz="6600" dirty="0" spc="2" kern="0">
                 <a:solidFill>
                   <a:srgbClr val="14161C"/>
                 </a:solidFill>
@@ -3098,10 +2895,10 @@
                 <a:ea typeface="Bricolage Grotesque ExtraBold" pitchFamily="34" charset="-122"/>
                 <a:cs typeface="Bricolage Grotesque ExtraBold" pitchFamily="34" charset="-120"/>
               </a:rPr>
-              <a:t> coi như không</a:t>
-            </a:r>
-            <a:r>
-              <a:rPr lang="en-US" sz="6600" dirty="0" spc="-24" kern="0">
+              <a:t> sở</a:t>
+            </a:r>
+            <a:r>
+              <a:rPr lang="en-US" sz="6600" dirty="0" spc="1" kern="0">
                 <a:solidFill>
                   <a:srgbClr val="14161C"/>
                 </a:solidFill>
@@ -3109,76 +2906,10 @@
                 <a:ea typeface="Bricolage Grotesque ExtraBold" pitchFamily="34" charset="-122"/>
                 <a:cs typeface="Bricolage Grotesque ExtraBold" pitchFamily="34" charset="-120"/>
               </a:rPr>
-              <a:t> có,</a:t>
-            </a:r>
-            <a:r>
-              <a:rPr lang="en-US" sz="6600" dirty="0" spc="-6" kern="0">
-                <a:solidFill>
-                  <a:srgbClr val="14161C"/>
-                </a:solidFill>
-                <a:latin typeface="Bricolage Grotesque ExtraBold" pitchFamily="34" charset="0"/>
-                <a:ea typeface="Bricolage Grotesque ExtraBold" pitchFamily="34" charset="-122"/>
-                <a:cs typeface="Bricolage Grotesque ExtraBold" pitchFamily="34" charset="-120"/>
-              </a:rPr>
-              <a:t> tải</a:t>
-            </a:r>
-            <a:r>
-              <a:rPr lang="en-US" sz="6600" dirty="0" spc="1" kern="0">
-                <a:solidFill>
-                  <a:srgbClr val="14161C"/>
-                </a:solidFill>
-                <a:latin typeface="Bricolage Grotesque ExtraBold" pitchFamily="34" charset="0"/>
-                <a:ea typeface="Bricolage Grotesque ExtraBold" pitchFamily="34" charset="-122"/>
-                <a:cs typeface="Bricolage Grotesque ExtraBold" pitchFamily="34" charset="-120"/>
-              </a:rPr>
-              <a:t> dồn</a:t>
-            </a:r>
-            <a:r>
-              <a:rPr lang="en-US" sz="6600" dirty="0" spc="-2" kern="0">
-                <a:solidFill>
-                  <a:srgbClr val="14161C"/>
-                </a:solidFill>
-                <a:latin typeface="Bricolage Grotesque ExtraBold" pitchFamily="34" charset="0"/>
-                <a:ea typeface="Bricolage Grotesque ExtraBold" pitchFamily="34" charset="-122"/>
-                <a:cs typeface="Bricolage Grotesque ExtraBold" pitchFamily="34" charset="-120"/>
-              </a:rPr>
-              <a:t> xuống</a:t>
-            </a:r>
-            <a:r>
-              <a:rPr lang="en-US" sz="6600" dirty="0" spc="0" kern="0">
-                <a:solidFill>
-                  <a:srgbClr val="14161C"/>
-                </a:solidFill>
-                <a:latin typeface="Bricolage Grotesque ExtraBold" pitchFamily="34" charset="0"/>
-                <a:ea typeface="Bricolage Grotesque ExtraBold" pitchFamily="34" charset="-122"/>
-                <a:cs typeface="Bricolage Grotesque ExtraBold" pitchFamily="34" charset="-120"/>
-              </a:rPr>
-              <a:t> cơ</a:t>
-            </a:r>
-            <a:r>
-              <a:rPr lang="en-US" sz="6600" dirty="0" spc="1" kern="0">
-                <a:solidFill>
-                  <a:srgbClr val="14161C"/>
-                </a:solidFill>
-                <a:latin typeface="Bricolage Grotesque ExtraBold" pitchFamily="34" charset="0"/>
-                <a:ea typeface="Bricolage Grotesque ExtraBold" pitchFamily="34" charset="-122"/>
-                <a:cs typeface="Bricolage Grotesque ExtraBold" pitchFamily="34" charset="-120"/>
-              </a:rPr>
-              <a:t> sở</a:t>
-            </a:r>
-            <a:r>
-              <a:rPr lang="en-US" sz="6600" dirty="0" spc="2" kern="0">
-                <a:solidFill>
-                  <a:srgbClr val="14161C"/>
-                </a:solidFill>
-                <a:latin typeface="Bricolage Grotesque ExtraBold" pitchFamily="34" charset="0"/>
-                <a:ea typeface="Bricolage Grotesque ExtraBold" pitchFamily="34" charset="-122"/>
-                <a:cs typeface="Bricolage Grotesque ExtraBold" pitchFamily="34" charset="-120"/>
-              </a:rPr>
               <a:t> dữ</a:t>
             </a:r>
             <a:r>
-              <a:rPr lang="en-US" sz="6600" dirty="0" spc="-2" kern="0">
+              <a:rPr lang="en-US" sz="6600" dirty="0" spc="-1" kern="0">
                 <a:solidFill>
                   <a:srgbClr val="14161C"/>
                 </a:solidFill>
@@ -5708,39 +5439,6 @@
                 <a:cs typeface="Be Vietnam Pro" pitchFamily="34" charset="-120"/>
               </a:rPr>
               <a:t> THỬ</a:t>
-            </a:r>
-            <a:r>
-              <a:rPr lang="en-US" sz="1800" b="1" spc="293" kern="0" dirty="0">
-                <a:solidFill>
-                  <a:srgbClr val="3DD6A0"/>
-                </a:solidFill>
-                <a:latin typeface="Be Vietnam Pro" pitchFamily="34" charset="0"/>
-                <a:ea typeface="Be Vietnam Pro" pitchFamily="34" charset="-122"/>
-                <a:cs typeface="Be Vietnam Pro" pitchFamily="34" charset="-120"/>
-              </a:rPr>
-              <a:t> VỚI</a:t>
-            </a:r>
-            <a:r>
-              <a:rPr lang="en-US" sz="1800" b="1" spc="299" kern="0" dirty="0">
-                <a:solidFill>
-                  <a:srgbClr val="3DD6A0"/>
-                </a:solidFill>
-                <a:latin typeface="Be Vietnam Pro" pitchFamily="34" charset="0"/>
-                <a:ea typeface="Be Vietnam Pro" pitchFamily="34" charset="-122"/>
-                <a:cs typeface="Be Vietnam Pro" pitchFamily="34" charset="-120"/>
-              </a:rPr>
-              <a:t> 100.000 MÃ</a:t>
-            </a:r>
-            <a:r>
-              <a:rPr lang="en-US" sz="1800" b="1" spc="236" kern="0" dirty="0">
-                <a:solidFill>
-                  <a:srgbClr val="3DD6A0"/>
-                </a:solidFill>
-                <a:latin typeface="Be Vietnam Pro" pitchFamily="34" charset="0"/>
-                <a:ea typeface="Be Vietnam Pro" pitchFamily="34" charset="-122"/>
-                <a:cs typeface="Be Vietnam Pro" pitchFamily="34" charset="-120"/>
-              </a:rPr>
-              <a:t> THẬT,</a:t>
             </a:r>
             <a:r>
               <a:rPr lang="en-US" sz="1800" b="1" spc="299" kern="0" dirty="0">
@@ -6935,7 +6633,7 @@
                 <a:ea typeface="Be Vietnam Pro" pitchFamily="34" charset="-122"/>
                 <a:cs typeface="Be Vietnam Pro" pitchFamily="34" charset="-120"/>
               </a:rPr>
-              <a:t> thể có”;</a:t>
+              <a:t> thể</a:t>
             </a:r>
             <a:r>
               <a:rPr lang="en-US" sz="2400" dirty="0" spc="0" kern="0">
@@ -6946,40 +6644,7 @@
                 <a:ea typeface="Be Vietnam Pro" pitchFamily="34" charset="-122"/>
                 <a:cs typeface="Be Vietnam Pro" pitchFamily="34" charset="-120"/>
               </a:rPr>
-              <a:t> không</a:t>
-            </a:r>
-            <a:r>
-              <a:rPr lang="en-US" sz="2400" dirty="0" spc="1" kern="0">
-                <a:solidFill>
-                  <a:srgbClr val="E4E1D8"/>
-                </a:solidFill>
-                <a:latin typeface="Be Vietnam Pro" pitchFamily="34" charset="0"/>
-                <a:ea typeface="Be Vietnam Pro" pitchFamily="34" charset="-122"/>
-                <a:cs typeface="Be Vietnam Pro" pitchFamily="34" charset="-120"/>
-              </a:rPr>
-              <a:t> có</a:t>
-            </a:r>
-            <a:r>
-              <a:rPr lang="en-US" sz="2400" dirty="0" spc="4" kern="0">
-                <a:solidFill>
-                  <a:srgbClr val="E4E1D8"/>
-                </a:solidFill>
-                <a:latin typeface="Be Vietnam Pro" pitchFamily="34" charset="0"/>
-                <a:ea typeface="Be Vietnam Pro" pitchFamily="34" charset="-122"/>
-                <a:cs typeface="Be Vietnam Pro" pitchFamily="34" charset="-120"/>
-              </a:rPr>
-              <a:t> âm</a:t>
-            </a:r>
-            <a:r>
-              <a:rPr lang="en-US" sz="2400" dirty="0" spc="1" kern="0">
-                <a:solidFill>
-                  <a:srgbClr val="E4E1D8"/>
-                </a:solidFill>
-                <a:latin typeface="Be Vietnam Pro" pitchFamily="34" charset="0"/>
-                <a:ea typeface="Be Vietnam Pro" pitchFamily="34" charset="-122"/>
-                <a:cs typeface="Be Vietnam Pro" pitchFamily="34" charset="-120"/>
-              </a:rPr>
-              <a:t> tính giả.</a:t>
+              <a:t> có”.</a:t>
             </a:r>
             <a:endParaRPr lang="en-US" sz="2400" dirty="0"/>
           </a:p>
@@ -8127,7 +7792,7 @@
               <a:t> lọt;</a:t>
             </a:r>
             <a:r>
-              <a:rPr lang="en-US" sz="2100" dirty="0" spc="-2" kern="0">
+              <a:rPr lang="en-US" sz="2100" dirty="0" spc="-29" kern="0">
                 <a:solidFill>
                   <a:srgbClr val="6B6A66"/>
                 </a:solidFill>
@@ -8135,10 +7800,10 @@
                 <a:ea typeface="Be Vietnam Pro" pitchFamily="34" charset="-122"/>
                 <a:cs typeface="Be Vietnam Pro" pitchFamily="34" charset="-120"/>
               </a:rPr>
-              <a:t> cơ</a:t>
-            </a:r>
-            <a:r>
-              <a:rPr lang="en-US" sz="2100" dirty="0" spc="-9" kern="0">
+              <a:t> kết</a:t>
+            </a:r>
+            <a:r>
+              <a:rPr lang="en-US" sz="2100" dirty="0" spc="-3" kern="0">
                 <a:solidFill>
                   <a:srgbClr val="6B6A66"/>
                 </a:solidFill>
@@ -8146,10 +7811,10 @@
                 <a:ea typeface="Be Vietnam Pro" pitchFamily="34" charset="-122"/>
                 <a:cs typeface="Be Vietnam Pro" pitchFamily="34" charset="-120"/>
               </a:rPr>
-              <a:t> sở</a:t>
-            </a:r>
-            <a:r>
-              <a:rPr lang="en-US" sz="2100" dirty="0" spc="-2" kern="0">
+              <a:t> quả</a:t>
+            </a:r>
+            <a:r>
+              <a:rPr lang="en-US" sz="2100" dirty="0" spc="-12" kern="0">
                 <a:solidFill>
                   <a:srgbClr val="6B6A66"/>
                 </a:solidFill>
@@ -8157,40 +7822,7 @@
                 <a:ea typeface="Be Vietnam Pro" pitchFamily="34" charset="-122"/>
                 <a:cs typeface="Be Vietnam Pro" pitchFamily="34" charset="-120"/>
               </a:rPr>
-              <a:t> dữ</a:t>
-            </a:r>
-            <a:r>
-              <a:rPr lang="en-US" sz="2100" dirty="0" spc="0" kern="0">
-                <a:solidFill>
-                  <a:srgbClr val="6B6A66"/>
-                </a:solidFill>
-                <a:latin typeface="Be Vietnam Pro" pitchFamily="34" charset="0"/>
-                <a:ea typeface="Be Vietnam Pro" pitchFamily="34" charset="-122"/>
-                <a:cs typeface="Be Vietnam Pro" pitchFamily="34" charset="-120"/>
-              </a:rPr>
-              <a:t> liệu</a:t>
-            </a:r>
-            <a:r>
-              <a:rPr lang="en-US" sz="2100" dirty="0" spc="-12" kern="0">
-                <a:solidFill>
-                  <a:srgbClr val="6B6A66"/>
-                </a:solidFill>
-                <a:latin typeface="Be Vietnam Pro" pitchFamily="34" charset="0"/>
-                <a:ea typeface="Be Vietnam Pro" pitchFamily="34" charset="-122"/>
-                <a:cs typeface="Be Vietnam Pro" pitchFamily="34" charset="-120"/>
-              </a:rPr>
               <a:t> vẫn</a:t>
-            </a:r>
-            <a:r>
-              <a:rPr lang="en-US" sz="2100" dirty="0" spc="-24" kern="0">
-                <a:solidFill>
-                  <a:srgbClr val="6B6A66"/>
-                </a:solidFill>
-                <a:latin typeface="Be Vietnam Pro" pitchFamily="34" charset="0"/>
-                <a:ea typeface="Be Vietnam Pro" pitchFamily="34" charset="-122"/>
-                <a:cs typeface="Be Vietnam Pro" pitchFamily="34" charset="-120"/>
-              </a:rPr>
-              <a:t> trả</a:t>
             </a:r>
             <a:r>
               <a:rPr lang="en-US" sz="2100" dirty="0" spc="1" kern="0">
@@ -9192,7 +8824,7 @@
               <a:buNone/>
             </a:pPr>
             <a:r>
-              <a:rPr lang="en-US" sz="2850" dirty="0" spc="1" kern="0">
+              <a:rPr lang="en-US" sz="2850" dirty="0" spc="-3" kern="0">
                 <a:solidFill>
                   <a:srgbClr val="F3EEE3"/>
                 </a:solidFill>
@@ -9200,10 +8832,10 @@
                 <a:ea typeface="Be Vietnam Pro" pitchFamily="34" charset="-122"/>
                 <a:cs typeface="Be Vietnam Pro" pitchFamily="34" charset="-120"/>
               </a:rPr>
-              <a:t>Mỗi</a:t>
-            </a:r>
-            <a:r>
-              <a:rPr lang="en-US" sz="2850" dirty="0" spc="-8" kern="0">
+              <a:t>Đã</a:t>
+            </a:r>
+            <a:r>
+              <a:rPr lang="en-US" sz="2850" dirty="0" spc="-15" kern="0">
                 <a:solidFill>
                   <a:srgbClr val="F3EEE3"/>
                 </a:solidFill>
@@ -9211,7 +8843,73 @@
                 <a:ea typeface="Be Vietnam Pro" pitchFamily="34" charset="-122"/>
                 <a:cs typeface="Be Vietnam Pro" pitchFamily="34" charset="-120"/>
               </a:rPr>
-              <a:t> giây</a:t>
+              <a:t> cất</a:t>
+            </a:r>
+            <a:r>
+              <a:rPr lang="en-US" sz="2850" dirty="0" spc="0" kern="0">
+                <a:solidFill>
+                  <a:srgbClr val="F3EEE3"/>
+                </a:solidFill>
+                <a:latin typeface="Be Vietnam Pro" pitchFamily="34" charset="0"/>
+                <a:ea typeface="Be Vietnam Pro" pitchFamily="34" charset="-122"/>
+                <a:cs typeface="Be Vietnam Pro" pitchFamily="34" charset="-120"/>
+              </a:rPr>
+              <a:t> giá</a:t>
+            </a:r>
+            <a:r>
+              <a:rPr lang="en-US" sz="2850" dirty="0" spc="15" kern="0">
+                <a:solidFill>
+                  <a:srgbClr val="F3EEE3"/>
+                </a:solidFill>
+                <a:latin typeface="Be Vietnam Pro" pitchFamily="34" charset="0"/>
+                <a:ea typeface="Be Vietnam Pro" pitchFamily="34" charset="-122"/>
+                <a:cs typeface="Be Vietnam Pro" pitchFamily="34" charset="-120"/>
+              </a:rPr>
+              <a:t> trị</a:t>
+            </a:r>
+            <a:r>
+              <a:rPr lang="en-US" sz="2850" dirty="0" spc="-19" kern="0">
+                <a:solidFill>
+                  <a:srgbClr val="F3EEE3"/>
+                </a:solidFill>
+                <a:latin typeface="Be Vietnam Pro" pitchFamily="34" charset="0"/>
+                <a:ea typeface="Be Vietnam Pro" pitchFamily="34" charset="-122"/>
+                <a:cs typeface="Be Vietnam Pro" pitchFamily="34" charset="-120"/>
+              </a:rPr>
+              <a:t> rỗng,</a:t>
+            </a:r>
+            <a:r>
+              <a:rPr lang="en-US" sz="2850" dirty="0" spc="-4" kern="0">
+                <a:solidFill>
+                  <a:srgbClr val="F3EEE3"/>
+                </a:solidFill>
+                <a:latin typeface="Be Vietnam Pro" pitchFamily="34" charset="0"/>
+                <a:ea typeface="Be Vietnam Pro" pitchFamily="34" charset="-122"/>
+                <a:cs typeface="Be Vietnam Pro" pitchFamily="34" charset="-120"/>
+              </a:rPr>
+              <a:t> sao</a:t>
+            </a:r>
+            <a:r>
+              <a:rPr lang="en-US" sz="2850" dirty="0" spc="-13" kern="0">
+                <a:solidFill>
+                  <a:srgbClr val="F3EEE3"/>
+                </a:solidFill>
+                <a:latin typeface="Be Vietnam Pro" pitchFamily="34" charset="0"/>
+                <a:ea typeface="Be Vietnam Pro" pitchFamily="34" charset="-122"/>
+                <a:cs typeface="Be Vietnam Pro" pitchFamily="34" charset="-120"/>
+              </a:rPr>
+              <a:t> vẫn</a:t>
+            </a:r>
+            <a:r>
+              <a:rPr lang="en-US" sz="2850" dirty="0" spc="0" kern="0">
+                <a:solidFill>
+                  <a:srgbClr val="F3EEE3"/>
+                </a:solidFill>
+                <a:latin typeface="Be Vietnam Pro" pitchFamily="34" charset="0"/>
+                <a:ea typeface="Be Vietnam Pro" pitchFamily="34" charset="-122"/>
+                <a:cs typeface="Be Vietnam Pro" pitchFamily="34" charset="-120"/>
+              </a:rPr>
+              <a:t> quá</a:t>
             </a:r>
             <a:r>
               <a:rPr lang="en-US" sz="2850" dirty="0" spc="-12" kern="0">
@@ -9222,227 +8920,7 @@
                 <a:ea typeface="Be Vietnam Pro" pitchFamily="34" charset="-122"/>
                 <a:cs typeface="Be Vietnam Pro" pitchFamily="34" charset="-120"/>
               </a:rPr>
-              <a:t> vài</a:t>
-            </a:r>
-            <a:r>
-              <a:rPr lang="en-US" sz="2850" dirty="0" spc="-2" kern="0">
-                <a:solidFill>
-                  <a:srgbClr val="F3EEE3"/>
-                </a:solidFill>
-                <a:latin typeface="Be Vietnam Pro" pitchFamily="34" charset="0"/>
-                <a:ea typeface="Be Vietnam Pro" pitchFamily="34" charset="-122"/>
-                <a:cs typeface="Be Vietnam Pro" pitchFamily="34" charset="-120"/>
-              </a:rPr>
-              <a:t> nghìn</a:t>
-            </a:r>
-            <a:r>
-              <a:rPr lang="en-US" sz="2850" dirty="0" spc="0" kern="0">
-                <a:solidFill>
-                  <a:srgbClr val="F3EEE3"/>
-                </a:solidFill>
-                <a:latin typeface="Be Vietnam Pro" pitchFamily="34" charset="0"/>
-                <a:ea typeface="Be Vietnam Pro" pitchFamily="34" charset="-122"/>
-                <a:cs typeface="Be Vietnam Pro" pitchFamily="34" charset="-120"/>
-              </a:rPr>
-              <a:t> mã</a:t>
-            </a:r>
-            <a:r>
-              <a:rPr lang="en-US" sz="2850" dirty="0" spc="1" kern="0">
-                <a:solidFill>
-                  <a:srgbClr val="F3EEE3"/>
-                </a:solidFill>
-                <a:latin typeface="Be Vietnam Pro" pitchFamily="34" charset="0"/>
-                <a:ea typeface="Be Vietnam Pro" pitchFamily="34" charset="-122"/>
-                <a:cs typeface="Be Vietnam Pro" pitchFamily="34" charset="-120"/>
-              </a:rPr>
-              <a:t> giả</a:t>
-            </a:r>
-            <a:r>
-              <a:rPr lang="en-US" sz="2850" dirty="0" spc="-1" kern="0">
-                <a:solidFill>
-                  <a:srgbClr val="F3EEE3"/>
-                </a:solidFill>
-                <a:latin typeface="Be Vietnam Pro" pitchFamily="34" charset="0"/>
-                <a:ea typeface="Be Vietnam Pro" pitchFamily="34" charset="-122"/>
-                <a:cs typeface="Be Vietnam Pro" pitchFamily="34" charset="-120"/>
-              </a:rPr>
-              <a:t> khác</a:t>
-            </a:r>
-            <a:r>
-              <a:rPr lang="en-US" sz="2850" dirty="0" spc="1" kern="0">
-                <a:solidFill>
-                  <a:srgbClr val="F3EEE3"/>
-                </a:solidFill>
-                <a:latin typeface="Be Vietnam Pro" pitchFamily="34" charset="0"/>
-                <a:ea typeface="Be Vietnam Pro" pitchFamily="34" charset="-122"/>
-                <a:cs typeface="Be Vietnam Pro" pitchFamily="34" charset="-120"/>
-              </a:rPr>
-              <a:t> nhau.</a:t>
-            </a:r>
-            <a:r>
-              <a:rPr lang="en-US" sz="2850" dirty="0" spc="0" kern="0">
-                <a:solidFill>
-                  <a:srgbClr val="F3EEE3"/>
-                </a:solidFill>
-                <a:latin typeface="Be Vietnam Pro" pitchFamily="34" charset="0"/>
-                <a:ea typeface="Be Vietnam Pro" pitchFamily="34" charset="-122"/>
-                <a:cs typeface="Be Vietnam Pro" pitchFamily="34" charset="-120"/>
-              </a:rPr>
-              <a:t> Đã</a:t>
-            </a:r>
-            <a:r>
-              <a:rPr lang="en-US" sz="2850" dirty="0" spc="-15" kern="0">
-                <a:solidFill>
-                  <a:srgbClr val="F3EEE3"/>
-                </a:solidFill>
-                <a:latin typeface="Be Vietnam Pro" pitchFamily="34" charset="0"/>
-                <a:ea typeface="Be Vietnam Pro" pitchFamily="34" charset="-122"/>
-                <a:cs typeface="Be Vietnam Pro" pitchFamily="34" charset="-120"/>
-              </a:rPr>
-              <a:t> cất</a:t>
-            </a:r>
-            <a:r>
-              <a:rPr lang="en-US" sz="2850" dirty="0" spc="0" kern="0">
-                <a:solidFill>
-                  <a:srgbClr val="F3EEE3"/>
-                </a:solidFill>
-                <a:latin typeface="Be Vietnam Pro" pitchFamily="34" charset="0"/>
-                <a:ea typeface="Be Vietnam Pro" pitchFamily="34" charset="-122"/>
-                <a:cs typeface="Be Vietnam Pro" pitchFamily="34" charset="-120"/>
-              </a:rPr>
-              <a:t> giá</a:t>
-            </a:r>
-            <a:r>
-              <a:rPr lang="en-US" sz="2850" dirty="0" spc="15" kern="0">
-                <a:solidFill>
-                  <a:srgbClr val="F3EEE3"/>
-                </a:solidFill>
-                <a:latin typeface="Be Vietnam Pro" pitchFamily="34" charset="0"/>
-                <a:ea typeface="Be Vietnam Pro" pitchFamily="34" charset="-122"/>
-                <a:cs typeface="Be Vietnam Pro" pitchFamily="34" charset="-120"/>
-              </a:rPr>
-              <a:t> trị</a:t>
-            </a:r>
-            <a:r>
-              <a:rPr lang="en-US" sz="2850" dirty="0" spc="-19" kern="0">
-                <a:solidFill>
-                  <a:srgbClr val="F3EEE3"/>
-                </a:solidFill>
-                <a:latin typeface="Be Vietnam Pro" pitchFamily="34" charset="0"/>
-                <a:ea typeface="Be Vietnam Pro" pitchFamily="34" charset="-122"/>
-                <a:cs typeface="Be Vietnam Pro" pitchFamily="34" charset="-120"/>
-              </a:rPr>
-              <a:t> rỗng,</a:t>
-            </a:r>
-            <a:r>
-              <a:rPr lang="en-US" sz="2850" dirty="0" spc="18" kern="0">
-                <a:solidFill>
-                  <a:srgbClr val="F3EEE3"/>
-                </a:solidFill>
-                <a:latin typeface="Be Vietnam Pro" pitchFamily="34" charset="0"/>
-                <a:ea typeface="Be Vietnam Pro" pitchFamily="34" charset="-122"/>
-                <a:cs typeface="Be Vietnam Pro" pitchFamily="34" charset="-120"/>
-              </a:rPr>
-              <a:t> nhưng</a:t>
-            </a:r>
-            <a:r>
-              <a:rPr lang="en-US" sz="2850" dirty="0" spc="2" kern="0">
-                <a:solidFill>
-                  <a:srgbClr val="F3EEE3"/>
-                </a:solidFill>
-                <a:latin typeface="Be Vietnam Pro" pitchFamily="34" charset="0"/>
-                <a:ea typeface="Be Vietnam Pro" pitchFamily="34" charset="-122"/>
-                <a:cs typeface="Be Vietnam Pro" pitchFamily="34" charset="-120"/>
-              </a:rPr>
-              <a:t> cơ</a:t>
-            </a:r>
-            <a:r>
-              <a:rPr lang="en-US" sz="2850" dirty="0" spc="-9" kern="0">
-                <a:solidFill>
-                  <a:srgbClr val="F3EEE3"/>
-                </a:solidFill>
-                <a:latin typeface="Be Vietnam Pro" pitchFamily="34" charset="0"/>
-                <a:ea typeface="Be Vietnam Pro" pitchFamily="34" charset="-122"/>
-                <a:cs typeface="Be Vietnam Pro" pitchFamily="34" charset="-120"/>
-              </a:rPr>
-              <a:t> sở</a:t>
-            </a:r>
-            <a:r>
-              <a:rPr lang="en-US" sz="2850" dirty="0" spc="-1" kern="0">
-                <a:solidFill>
-                  <a:srgbClr val="F3EEE3"/>
-                </a:solidFill>
-                <a:latin typeface="Be Vietnam Pro" pitchFamily="34" charset="0"/>
-                <a:ea typeface="Be Vietnam Pro" pitchFamily="34" charset="-122"/>
-                <a:cs typeface="Be Vietnam Pro" pitchFamily="34" charset="-120"/>
-              </a:rPr>
-              <a:t> dữ</a:t>
-            </a:r>
-            <a:r>
-              <a:rPr lang="en-US" sz="2850" dirty="0" spc="2" kern="0">
-                <a:solidFill>
-                  <a:srgbClr val="F3EEE3"/>
-                </a:solidFill>
-                <a:latin typeface="Be Vietnam Pro" pitchFamily="34" charset="0"/>
-                <a:ea typeface="Be Vietnam Pro" pitchFamily="34" charset="-122"/>
-                <a:cs typeface="Be Vietnam Pro" pitchFamily="34" charset="-120"/>
-              </a:rPr>
-              <a:t> liệu</a:t>
-            </a:r>
-            <a:r>
-              <a:rPr lang="en-US" sz="2850" dirty="0" spc="-14" kern="0">
-                <a:solidFill>
-                  <a:srgbClr val="F3EEE3"/>
-                </a:solidFill>
-                <a:latin typeface="Be Vietnam Pro" pitchFamily="34" charset="0"/>
-                <a:ea typeface="Be Vietnam Pro" pitchFamily="34" charset="-122"/>
-                <a:cs typeface="Be Vietnam Pro" pitchFamily="34" charset="-120"/>
-              </a:rPr>
-              <a:t> vẫn</a:t>
-            </a:r>
-            <a:r>
-              <a:rPr lang="en-US" sz="2850" dirty="0" spc="0" kern="0">
-                <a:solidFill>
-                  <a:srgbClr val="F3EEE3"/>
-                </a:solidFill>
-                <a:latin typeface="Be Vietnam Pro" pitchFamily="34" charset="0"/>
-                <a:ea typeface="Be Vietnam Pro" pitchFamily="34" charset="-122"/>
-                <a:cs typeface="Be Vietnam Pro" pitchFamily="34" charset="-120"/>
-              </a:rPr>
-              <a:t> quá</a:t>
-            </a:r>
-            <a:r>
-              <a:rPr lang="en-US" sz="2850" dirty="0" spc="-10" kern="0">
-                <a:solidFill>
-                  <a:srgbClr val="F3EEE3"/>
-                </a:solidFill>
-                <a:latin typeface="Be Vietnam Pro" pitchFamily="34" charset="0"/>
-                <a:ea typeface="Be Vietnam Pro" pitchFamily="34" charset="-122"/>
-                <a:cs typeface="Be Vietnam Pro" pitchFamily="34" charset="-120"/>
-              </a:rPr>
-              <a:t> tải.</a:t>
-            </a:r>
-            <a:r>
-              <a:rPr lang="en-US" sz="2850" dirty="0" spc="48" kern="0">
-                <a:solidFill>
-                  <a:srgbClr val="F3EEE3"/>
-                </a:solidFill>
-                <a:latin typeface="Be Vietnam Pro" pitchFamily="34" charset="0"/>
-                <a:ea typeface="Be Vietnam Pro" pitchFamily="34" charset="-122"/>
-                <a:cs typeface="Be Vietnam Pro" pitchFamily="34" charset="-120"/>
-              </a:rPr>
-              <a:t> Vì</a:t>
-            </a:r>
-            <a:r>
-              <a:rPr lang="en-US" sz="2850" dirty="0" spc="-4" kern="0">
-                <a:solidFill>
-                  <a:srgbClr val="F3EEE3"/>
-                </a:solidFill>
-                <a:latin typeface="Be Vietnam Pro" pitchFamily="34" charset="0"/>
-                <a:ea typeface="Be Vietnam Pro" pitchFamily="34" charset="-122"/>
-                <a:cs typeface="Be Vietnam Pro" pitchFamily="34" charset="-120"/>
-              </a:rPr>
-              <a:t> sao?</a:t>
+              <a:t> tải?</a:t>
             </a:r>
             <a:endParaRPr lang="en-US" sz="2850" dirty="0"/>
           </a:p>
@@ -9606,7 +9084,7 @@
               <a:t> không</a:t>
             </a:r>
             <a:r>
-              <a:rPr lang="en-US" sz="2550" dirty="0" spc="-4" kern="0">
+              <a:rPr lang="en-US" sz="2550" dirty="0" spc="-1" kern="0">
                 <a:solidFill>
                   <a:srgbClr val="E4E1D8"/>
                 </a:solidFill>
@@ -9614,7 +9092,7 @@
                 <a:ea typeface="Be Vietnam Pro" pitchFamily="34" charset="-122"/>
                 <a:cs typeface="Be Vietnam Pro" pitchFamily="34" charset="-120"/>
               </a:rPr>
-              <a:t> bao</a:t>
+              <a:t> dùng</a:t>
             </a:r>
             <a:r>
               <a:rPr lang="en-US" sz="2550" dirty="0" spc="0" kern="0">
@@ -9625,95 +9103,7 @@
                 <a:ea typeface="Be Vietnam Pro" pitchFamily="34" charset="-122"/>
                 <a:cs typeface="Be Vietnam Pro" pitchFamily="34" charset="-120"/>
               </a:rPr>
-              <a:t> giờ</a:t>
-            </a:r>
-            <a:r>
-              <a:rPr lang="en-US" sz="2550" dirty="0" spc="6" kern="0">
-                <a:solidFill>
-                  <a:srgbClr val="E4E1D8"/>
-                </a:solidFill>
-                <a:latin typeface="Be Vietnam Pro" pitchFamily="34" charset="0"/>
-                <a:ea typeface="Be Vietnam Pro" pitchFamily="34" charset="-122"/>
-                <a:cs typeface="Be Vietnam Pro" pitchFamily="34" charset="-120"/>
-              </a:rPr>
-              <a:t> được</a:t>
-            </a:r>
-            <a:r>
-              <a:rPr lang="en-US" sz="2550" dirty="0" spc="-1" kern="0">
-                <a:solidFill>
-                  <a:srgbClr val="E4E1D8"/>
-                </a:solidFill>
-                <a:latin typeface="Be Vietnam Pro" pitchFamily="34" charset="0"/>
-                <a:ea typeface="Be Vietnam Pro" pitchFamily="34" charset="-122"/>
-                <a:cs typeface="Be Vietnam Pro" pitchFamily="34" charset="-120"/>
-              </a:rPr>
-              <a:t> dùng</a:t>
-            </a:r>
-            <a:r>
-              <a:rPr lang="en-US" sz="2550" dirty="0" spc="0" kern="0">
-                <a:solidFill>
-                  <a:srgbClr val="E4E1D8"/>
-                </a:solidFill>
-                <a:latin typeface="Be Vietnam Pro" pitchFamily="34" charset="0"/>
-                <a:ea typeface="Be Vietnam Pro" pitchFamily="34" charset="-122"/>
-                <a:cs typeface="Be Vietnam Pro" pitchFamily="34" charset="-120"/>
-              </a:rPr>
-              <a:t> lại,</a:t>
-            </a:r>
-            <a:r>
-              <a:rPr lang="en-US" sz="2550" dirty="0" spc="-1" kern="0">
-                <a:solidFill>
-                  <a:srgbClr val="E4E1D8"/>
-                </a:solidFill>
-                <a:latin typeface="Be Vietnam Pro" pitchFamily="34" charset="0"/>
-                <a:ea typeface="Be Vietnam Pro" pitchFamily="34" charset="-122"/>
-                <a:cs typeface="Be Vietnam Pro" pitchFamily="34" charset="-120"/>
-              </a:rPr>
-              <a:t> còn</a:t>
-            </a:r>
-            <a:r>
-              <a:rPr lang="en-US" sz="2550" dirty="0" spc="18" kern="0">
-                <a:solidFill>
-                  <a:srgbClr val="E4E1D8"/>
-                </a:solidFill>
-                <a:latin typeface="Be Vietnam Pro" pitchFamily="34" charset="0"/>
-                <a:ea typeface="Be Vietnam Pro" pitchFamily="34" charset="-122"/>
-                <a:cs typeface="Be Vietnam Pro" pitchFamily="34" charset="-120"/>
-              </a:rPr>
-              <a:t> để</a:t>
-            </a:r>
-            <a:r>
-              <a:rPr lang="en-US" sz="2550" dirty="0" spc="0" kern="0">
-                <a:solidFill>
-                  <a:srgbClr val="E4E1D8"/>
-                </a:solidFill>
-                <a:latin typeface="Be Vietnam Pro" pitchFamily="34" charset="0"/>
-                <a:ea typeface="Be Vietnam Pro" pitchFamily="34" charset="-122"/>
-                <a:cs typeface="Be Vietnam Pro" pitchFamily="34" charset="-120"/>
-              </a:rPr>
-              <a:t> lại</a:t>
-            </a:r>
-            <a:r>
-              <a:rPr lang="en-US" sz="2550" dirty="0" spc="-2" kern="0">
-                <a:solidFill>
-                  <a:srgbClr val="E4E1D8"/>
-                </a:solidFill>
-                <a:latin typeface="Be Vietnam Pro" pitchFamily="34" charset="0"/>
-                <a:ea typeface="Be Vietnam Pro" pitchFamily="34" charset="-122"/>
-                <a:cs typeface="Be Vietnam Pro" pitchFamily="34" charset="-120"/>
-              </a:rPr>
-              <a:t> khóa</a:t>
-            </a:r>
-            <a:r>
-              <a:rPr lang="en-US" sz="2550" dirty="0" spc="-19" kern="0">
-                <a:solidFill>
-                  <a:srgbClr val="E4E1D8"/>
-                </a:solidFill>
-                <a:latin typeface="Be Vietnam Pro" pitchFamily="34" charset="0"/>
-                <a:ea typeface="Be Vietnam Pro" pitchFamily="34" charset="-122"/>
-                <a:cs typeface="Be Vietnam Pro" pitchFamily="34" charset="-120"/>
-              </a:rPr>
-              <a:t> rác.</a:t>
+              <a:t> lại.</a:t>
             </a:r>
             <a:endParaRPr lang="en-US" sz="2550" dirty="0"/>
           </a:p>
@@ -13028,6 +12418,28 @@
               <a:buNone/>
             </a:pPr>
             <a:r>
+              <a:rPr lang="en-US" sz="1800" dirty="0" spc="-3" kern="0">
+                <a:solidFill>
+                  <a:srgbClr val="9AA0B5"/>
+                </a:solidFill>
+                <a:latin typeface="Be Vietnam Pro" pitchFamily="34" charset="0"/>
+                <a:ea typeface="Be Vietnam Pro" pitchFamily="34" charset="-122"/>
+                <a:cs typeface="Be Vietnam Pro" pitchFamily="34" charset="-120"/>
+              </a:rPr>
+              <a:t>Nguồn</a:t>
+            </a:r>
+            <a:r>
+              <a:rPr lang="en-US" sz="1800" dirty="0" spc="-9" kern="0">
+                <a:solidFill>
+                  <a:srgbClr val="9AA0B5"/>
+                </a:solidFill>
+                <a:latin typeface="Be Vietnam Pro" pitchFamily="34" charset="0"/>
+                <a:ea typeface="Be Vietnam Pro" pitchFamily="34" charset="-122"/>
+                <a:cs typeface="Be Vietnam Pro" pitchFamily="34" charset="-120"/>
+              </a:rPr>
+              <a:t> tại</a:t>
+            </a:r>
+            <a:r>
               <a:rPr lang="en-US" sz="1800" dirty="0" spc="-1" kern="0">
                 <a:solidFill>
                   <a:srgbClr val="9AA0B5"/>
@@ -13036,10 +12448,10 @@
                 <a:ea typeface="Be Vietnam Pro" pitchFamily="34" charset="-122"/>
                 <a:cs typeface="Be Vietnam Pro" pitchFamily="34" charset="-120"/>
               </a:rPr>
-              <a:t>Mỗi</a:t>
-            </a:r>
-            <a:r>
-              <a:rPr lang="en-US" sz="1800" dirty="0" spc="-4" kern="0">
+              <a:t> commit</a:t>
+            </a:r>
+            <a:r>
+              <a:rPr lang="en-US" sz="1800" dirty="0" spc="2" kern="0">
                 <a:solidFill>
                   <a:srgbClr val="9AA0B5"/>
                 </a:solidFill>
@@ -13047,10 +12459,10 @@
                 <a:ea typeface="Be Vietnam Pro" pitchFamily="34" charset="-122"/>
                 <a:cs typeface="Be Vietnam Pro" pitchFamily="34" charset="-120"/>
               </a:rPr>
-              <a:t> nguồn</a:t>
-            </a:r>
-            <a:r>
-              <a:rPr lang="en-US" sz="1800" dirty="0" spc="-10" kern="0">
+              <a:t> cố</a:t>
+            </a:r>
+            <a:r>
+              <a:rPr lang="en-US" sz="1800" dirty="0" spc="10" kern="0">
                 <a:solidFill>
                   <a:srgbClr val="9AA0B5"/>
                 </a:solidFill>
@@ -13058,10 +12470,10 @@
                 <a:ea typeface="Be Vietnam Pro" pitchFamily="34" charset="-122"/>
                 <a:cs typeface="Be Vietnam Pro" pitchFamily="34" charset="-120"/>
               </a:rPr>
-              <a:t> tại</a:t>
-            </a:r>
-            <a:r>
-              <a:rPr lang="en-US" sz="1800" dirty="0" spc="-6" kern="0">
+              <a:t> định;</a:t>
+            </a:r>
+            <a:r>
+              <a:rPr lang="en-US" sz="1800" dirty="0" spc="0" kern="0">
                 <a:solidFill>
                   <a:srgbClr val="9AA0B5"/>
                 </a:solidFill>
@@ -13069,10 +12481,10 @@
                 <a:ea typeface="Be Vietnam Pro" pitchFamily="34" charset="-122"/>
                 <a:cs typeface="Be Vietnam Pro" pitchFamily="34" charset="-120"/>
               </a:rPr>
-              <a:t> một</a:t>
-            </a:r>
-            <a:r>
-              <a:rPr lang="en-US" sz="1800" dirty="0" spc="-1" kern="0">
+              <a:t> thử</a:t>
+            </a:r>
+            <a:r>
+              <a:rPr lang="en-US" sz="1800" dirty="0" spc="-15" kern="0">
                 <a:solidFill>
                   <a:srgbClr val="9AA0B5"/>
                 </a:solidFill>
@@ -13080,10 +12492,10 @@
                 <a:ea typeface="Be Vietnam Pro" pitchFamily="34" charset="-122"/>
                 <a:cs typeface="Be Vietnam Pro" pitchFamily="34" charset="-120"/>
               </a:rPr>
-              <a:t> commit</a:t>
-            </a:r>
-            <a:r>
-              <a:rPr lang="en-US" sz="1800" dirty="0" spc="2" kern="0">
+              <a:t> ngày</a:t>
+            </a:r>
+            <a:r>
+              <a:rPr lang="en-US" sz="1800" dirty="0" spc="1" kern="0">
                 <a:solidFill>
                   <a:srgbClr val="9AA0B5"/>
                 </a:solidFill>
@@ -13091,106 +12503,7 @@
                 <a:ea typeface="Be Vietnam Pro" pitchFamily="34" charset="-122"/>
                 <a:cs typeface="Be Vietnam Pro" pitchFamily="34" charset="-120"/>
               </a:rPr>
-              <a:t> cố</a:t>
-            </a:r>
-            <a:r>
-              <a:rPr lang="en-US" sz="1800" dirty="0" spc="11" kern="0">
-                <a:solidFill>
-                  <a:srgbClr val="9AA0B5"/>
-                </a:solidFill>
-                <a:latin typeface="Be Vietnam Pro" pitchFamily="34" charset="0"/>
-                <a:ea typeface="Be Vietnam Pro" pitchFamily="34" charset="-122"/>
-                <a:cs typeface="Be Vietnam Pro" pitchFamily="34" charset="-120"/>
-              </a:rPr>
-              <a:t> định.</a:t>
-            </a:r>
-            <a:r>
-              <a:rPr lang="en-US" sz="1800" dirty="0" spc="0" kern="0">
-                <a:solidFill>
-                  <a:srgbClr val="9AA0B5"/>
-                </a:solidFill>
-                <a:latin typeface="Be Vietnam Pro" pitchFamily="34" charset="0"/>
-                <a:ea typeface="Be Vietnam Pro" pitchFamily="34" charset="-122"/>
-                <a:cs typeface="Be Vietnam Pro" pitchFamily="34" charset="-120"/>
-              </a:rPr>
-              <a:t> Thử</a:t>
-            </a:r>
-            <a:r>
-              <a:rPr lang="en-US" sz="1800" dirty="0" spc="-15" kern="0">
-                <a:solidFill>
-                  <a:srgbClr val="9AA0B5"/>
-                </a:solidFill>
-                <a:latin typeface="Be Vietnam Pro" pitchFamily="34" charset="0"/>
-                <a:ea typeface="Be Vietnam Pro" pitchFamily="34" charset="-122"/>
-                <a:cs typeface="Be Vietnam Pro" pitchFamily="34" charset="-120"/>
-              </a:rPr>
-              <a:t> ngày</a:t>
-            </a:r>
-            <a:r>
-              <a:rPr lang="en-US" sz="1800" dirty="0" spc="1" kern="0">
-                <a:solidFill>
-                  <a:srgbClr val="9AA0B5"/>
-                </a:solidFill>
-                <a:latin typeface="Be Vietnam Pro" pitchFamily="34" charset="0"/>
-                <a:ea typeface="Be Vietnam Pro" pitchFamily="34" charset="-122"/>
-                <a:cs typeface="Be Vietnam Pro" pitchFamily="34" charset="-120"/>
-              </a:rPr>
               <a:t> 2026-10-18.</a:t>
-            </a:r>
-            <a:r>
-              <a:rPr lang="en-US" sz="1800" dirty="0" spc="-2" kern="0">
-                <a:solidFill>
-                  <a:srgbClr val="9AA0B5"/>
-                </a:solidFill>
-                <a:latin typeface="Be Vietnam Pro" pitchFamily="34" charset="0"/>
-                <a:ea typeface="Be Vietnam Pro" pitchFamily="34" charset="-122"/>
-                <a:cs typeface="Be Vietnam Pro" pitchFamily="34" charset="-120"/>
-              </a:rPr>
-              <a:t> Hình</a:t>
-            </a:r>
-            <a:r>
-              <a:rPr lang="en-US" sz="1800" dirty="0" spc="-5" kern="0">
-                <a:solidFill>
-                  <a:srgbClr val="9AA0B5"/>
-                </a:solidFill>
-                <a:latin typeface="Be Vietnam Pro" pitchFamily="34" charset="0"/>
-                <a:ea typeface="Be Vietnam Pro" pitchFamily="34" charset="-122"/>
-                <a:cs typeface="Be Vietnam Pro" pitchFamily="34" charset="-120"/>
-              </a:rPr>
-              <a:t> thiết</a:t>
-            </a:r>
-            <a:r>
-              <a:rPr lang="en-US" sz="1800" dirty="0" spc="-28" kern="0">
-                <a:solidFill>
-                  <a:srgbClr val="9AA0B5"/>
-                </a:solidFill>
-                <a:latin typeface="Be Vietnam Pro" pitchFamily="34" charset="0"/>
-                <a:ea typeface="Be Vietnam Pro" pitchFamily="34" charset="-122"/>
-                <a:cs typeface="Be Vietnam Pro" pitchFamily="34" charset="-120"/>
-              </a:rPr>
-              <a:t> kế</a:t>
-            </a:r>
-            <a:r>
-              <a:rPr lang="en-US" sz="1800" dirty="0" spc="9" kern="0">
-                <a:solidFill>
-                  <a:srgbClr val="9AA0B5"/>
-                </a:solidFill>
-                <a:latin typeface="Be Vietnam Pro" pitchFamily="34" charset="0"/>
-                <a:ea typeface="Be Vietnam Pro" pitchFamily="34" charset="-122"/>
-                <a:cs typeface="Be Vietnam Pro" pitchFamily="34" charset="-120"/>
-              </a:rPr>
-              <a:t> độc</a:t>
-            </a:r>
-            <a:r>
-              <a:rPr lang="en-US" sz="1800" dirty="0" spc="0" kern="0">
-                <a:solidFill>
-                  <a:srgbClr val="9AA0B5"/>
-                </a:solidFill>
-                <a:latin typeface="Be Vietnam Pro" pitchFamily="34" charset="0"/>
-                <a:ea typeface="Be Vietnam Pro" pitchFamily="34" charset="-122"/>
-                <a:cs typeface="Be Vietnam Pro" pitchFamily="34" charset="-120"/>
-              </a:rPr>
-              <a:t> lập.</a:t>
             </a:r>
             <a:endParaRPr lang="en-US" sz="1800" dirty="0"/>
           </a:p>

--- a/system-design-101/vi/lessons/sd-06-013/slides/sd-06-013.pptx
+++ b/system-design-101/vi/lessons/sd-06-013/slides/sd-06-013.pptx
@@ -8954,7 +8954,7 @@
               <a:buNone/>
             </a:pPr>
             <a:r>
-              <a:rPr lang="en-US" sz="13500" dirty="0" spc="0" kern="0">
+              <a:rPr lang="en-US" sz="13500" dirty="0" spc="-92" kern="0">
                 <a:solidFill>
                   <a:srgbClr val="FF6A4D"/>
                 </a:solidFill>
@@ -8962,18 +8962,7 @@
                 <a:ea typeface="Bricolage Grotesque ExtraBold" pitchFamily="34" charset="-122"/>
                 <a:cs typeface="Bricolage Grotesque ExtraBold" pitchFamily="34" charset="-120"/>
               </a:rPr>
-              <a:t>mỗi</a:t>
-            </a:r>
-            <a:r>
-              <a:rPr lang="en-US" sz="13500" dirty="0" spc="2" kern="0">
-                <a:solidFill>
-                  <a:srgbClr val="FF6A4D"/>
-                </a:solidFill>
-                <a:latin typeface="Bricolage Grotesque ExtraBold" pitchFamily="34" charset="0"/>
-                <a:ea typeface="Bricolage Grotesque ExtraBold" pitchFamily="34" charset="-122"/>
-                <a:cs typeface="Bricolage Grotesque ExtraBold" pitchFamily="34" charset="-120"/>
-              </a:rPr>
-              <a:t> mã</a:t>
+              <a:t>20.000</a:t>
             </a:r>
             <a:endParaRPr lang="en-US" sz="13500" dirty="0"/>
           </a:p>
@@ -9007,6 +8996,17 @@
               <a:buNone/>
             </a:pPr>
             <a:r>
+              <a:rPr lang="en-US" sz="2550" dirty="0" spc="2" kern="0">
+                <a:solidFill>
+                  <a:srgbClr val="E4E1D8"/>
+                </a:solidFill>
+                <a:latin typeface="Be Vietnam Pro" pitchFamily="34" charset="0"/>
+                <a:ea typeface="Be Vietnam Pro" pitchFamily="34" charset="-122"/>
+                <a:cs typeface="Be Vietnam Pro" pitchFamily="34" charset="-120"/>
+              </a:rPr>
+              <a:t>mã</a:t>
+            </a:r>
+            <a:r>
               <a:rPr lang="en-US" sz="2550" dirty="0" spc="1" kern="0">
                 <a:solidFill>
                   <a:srgbClr val="E4E1D8"/>
@@ -9015,7 +9015,40 @@
                 <a:ea typeface="Be Vietnam Pro" pitchFamily="34" charset="-122"/>
                 <a:cs typeface="Be Vietnam Pro" pitchFamily="34" charset="-120"/>
               </a:rPr>
-              <a:t>chỉ</a:t>
+              <a:t> khác</a:t>
+            </a:r>
+            <a:r>
+              <a:rPr lang="en-US" sz="2550" dirty="0" spc="0" kern="0">
+                <a:solidFill>
+                  <a:srgbClr val="E4E1D8"/>
+                </a:solidFill>
+                <a:latin typeface="Be Vietnam Pro" pitchFamily="34" charset="0"/>
+                <a:ea typeface="Be Vietnam Pro" pitchFamily="34" charset="-122"/>
+                <a:cs typeface="Be Vietnam Pro" pitchFamily="34" charset="-120"/>
+              </a:rPr>
+              <a:t> nhau</a:t>
+            </a:r>
+            <a:r>
+              <a:rPr lang="en-US" sz="2550" dirty="0" spc="-14" kern="0">
+                <a:solidFill>
+                  <a:srgbClr val="E4E1D8"/>
+                </a:solidFill>
+                <a:latin typeface="Be Vietnam Pro" pitchFamily="34" charset="0"/>
+                <a:ea typeface="Be Vietnam Pro" pitchFamily="34" charset="-122"/>
+                <a:cs typeface="Be Vietnam Pro" pitchFamily="34" charset="-120"/>
+              </a:rPr>
+              <a:t> vẫn</a:t>
+            </a:r>
+            <a:r>
+              <a:rPr lang="en-US" sz="2550" dirty="0" spc="1" kern="0">
+                <a:solidFill>
+                  <a:srgbClr val="E4E1D8"/>
+                </a:solidFill>
+                <a:latin typeface="Be Vietnam Pro" pitchFamily="34" charset="0"/>
+                <a:ea typeface="Be Vietnam Pro" pitchFamily="34" charset="-122"/>
+                <a:cs typeface="Be Vietnam Pro" pitchFamily="34" charset="-120"/>
+              </a:rPr>
+              <a:t> là</a:t>
             </a:r>
             <a:r>
               <a:rPr lang="en-US" sz="2550" dirty="0" spc="-1" kern="0">
@@ -9026,10 +9059,10 @@
                 <a:ea typeface="Be Vietnam Pro" pitchFamily="34" charset="-122"/>
                 <a:cs typeface="Be Vietnam Pro" pitchFamily="34" charset="-120"/>
               </a:rPr>
-              <a:t> hỏi</a:t>
-            </a:r>
-            <a:r>
-              <a:rPr lang="en-US" sz="2550" dirty="0" spc="-5" kern="0">
+              <a:t> 20.000</a:t>
+            </a:r>
+            <a:r>
+              <a:rPr lang="en-US" sz="2550" dirty="0" spc="1" kern="0">
                 <a:solidFill>
                   <a:srgbClr val="E4E1D8"/>
                 </a:solidFill>
@@ -9037,10 +9070,10 @@
                 <a:ea typeface="Be Vietnam Pro" pitchFamily="34" charset="-122"/>
                 <a:cs typeface="Be Vietnam Pro" pitchFamily="34" charset="-120"/>
               </a:rPr>
-              <a:t> một</a:t>
-            </a:r>
-            <a:r>
-              <a:rPr lang="en-US" sz="2550" dirty="0" spc="1" kern="0">
+              <a:t> lần</a:t>
+            </a:r>
+            <a:r>
+              <a:rPr lang="en-US" sz="2550" dirty="0" spc="0" kern="0">
                 <a:solidFill>
                   <a:srgbClr val="E4E1D8"/>
                 </a:solidFill>
@@ -9048,62 +9081,7 @@
                 <a:ea typeface="Be Vietnam Pro" pitchFamily="34" charset="-122"/>
                 <a:cs typeface="Be Vietnam Pro" pitchFamily="34" charset="-120"/>
               </a:rPr>
-              <a:t> lần: giá</a:t>
-            </a:r>
-            <a:r>
-              <a:rPr lang="en-US" sz="2550" dirty="0" spc="14" kern="0">
-                <a:solidFill>
-                  <a:srgbClr val="E4E1D8"/>
-                </a:solidFill>
-                <a:latin typeface="Be Vietnam Pro" pitchFamily="34" charset="0"/>
-                <a:ea typeface="Be Vietnam Pro" pitchFamily="34" charset="-122"/>
-                <a:cs typeface="Be Vietnam Pro" pitchFamily="34" charset="-120"/>
-              </a:rPr>
-              <a:t> trị</a:t>
-            </a:r>
-            <a:r>
-              <a:rPr lang="en-US" sz="2550" dirty="0" spc="-21" kern="0">
-                <a:solidFill>
-                  <a:srgbClr val="E4E1D8"/>
-                </a:solidFill>
-                <a:latin typeface="Be Vietnam Pro" pitchFamily="34" charset="0"/>
-                <a:ea typeface="Be Vietnam Pro" pitchFamily="34" charset="-122"/>
-                <a:cs typeface="Be Vietnam Pro" pitchFamily="34" charset="-120"/>
-              </a:rPr>
-              <a:t> rỗng</a:t>
-            </a:r>
-            <a:r>
-              <a:rPr lang="en-US" sz="2550" dirty="0" spc="1" kern="0">
-                <a:solidFill>
-                  <a:srgbClr val="E4E1D8"/>
-                </a:solidFill>
-                <a:latin typeface="Be Vietnam Pro" pitchFamily="34" charset="0"/>
-                <a:ea typeface="Be Vietnam Pro" pitchFamily="34" charset="-122"/>
-                <a:cs typeface="Be Vietnam Pro" pitchFamily="34" charset="-120"/>
-              </a:rPr>
-              <a:t> không</a:t>
-            </a:r>
-            <a:r>
-              <a:rPr lang="en-US" sz="2550" dirty="0" spc="-1" kern="0">
-                <a:solidFill>
-                  <a:srgbClr val="E4E1D8"/>
-                </a:solidFill>
-                <a:latin typeface="Be Vietnam Pro" pitchFamily="34" charset="0"/>
-                <a:ea typeface="Be Vietnam Pro" pitchFamily="34" charset="-122"/>
-                <a:cs typeface="Be Vietnam Pro" pitchFamily="34" charset="-120"/>
-              </a:rPr>
-              <a:t> dùng</a:t>
-            </a:r>
-            <a:r>
-              <a:rPr lang="en-US" sz="2550" dirty="0" spc="0" kern="0">
-                <a:solidFill>
-                  <a:srgbClr val="E4E1D8"/>
-                </a:solidFill>
-                <a:latin typeface="Be Vietnam Pro" pitchFamily="34" charset="0"/>
-                <a:ea typeface="Be Vietnam Pro" pitchFamily="34" charset="-122"/>
-                <a:cs typeface="Be Vietnam Pro" pitchFamily="34" charset="-120"/>
-              </a:rPr>
-              <a:t> lại.</a:t>
+              <a:t> hỏi.</a:t>
             </a:r>
             <a:endParaRPr lang="en-US" sz="2550" dirty="0"/>
           </a:p>
